--- a/content/youtube/shorts/SHORT_NEWS_02_anthropic_autonomy.pptx
+++ b/content/youtube/shorts/SHORT_NEWS_02_anthropic_autonomy.pptx
@@ -3088,7 +3088,7 @@
     <p:bg>
       <p:bgPr>
         <a:solidFill>
-          <a:srgbClr val="1C1917"/>
+          <a:srgbClr val="12100E"/>
         </a:solidFill>
         <a:effectLst/>
       </p:bgPr>
@@ -3102,20 +3102,22 @@
       <p:grpSpPr/>
       <p:sp>
         <p:nvSpPr>
-          <p:cNvPr id="2" name="Rectangle 1"/>
+          <p:cNvPr id="2" name="Rounded Rectangle 1"/>
           <p:cNvSpPr/>
           <p:nvPr/>
         </p:nvSpPr>
         <p:spPr>
           <a:xfrm>
-            <a:off x="0" y="0"/>
-            <a:ext cx="4114800" cy="54864"/>
+            <a:off x="320040" y="457200"/>
+            <a:ext cx="1645920" cy="274320"/>
           </a:xfrm>
-          <a:prstGeom prst="rect">
-            <a:avLst/>
+          <a:prstGeom prst="roundRect">
+            <a:avLst>
+              <a:gd name="adj" fmla="val 35000"/>
+            </a:avLst>
           </a:prstGeom>
           <a:solidFill>
-            <a:srgbClr val="B8942F"/>
+            <a:srgbClr val="E84D3D"/>
           </a:solidFill>
           <a:ln>
             <a:noFill/>
@@ -3136,10 +3138,19 @@
           </a:fontRef>
         </p:style>
         <p:txBody>
-          <a:bodyPr rtlCol="0" anchor="ctr"/>
+          <a:bodyPr rtlCol="0" anchor="ctr" wrap="none"/>
           <a:lstStyle/>
           <a:p>
             <a:pPr algn="ctr"/>
+            <a:r>
+              <a:rPr sz="1100" b="1">
+                <a:solidFill>
+                  <a:srgbClr val="F5F0EB"/>
+                </a:solidFill>
+                <a:latin typeface="Hiragino Sans"/>
+              </a:rPr>
+              <a:t>3月18日 Anthropic発表</a:t>
+            </a:r>
           </a:p>
         </p:txBody>
       </p:sp>
@@ -3151,8 +3162,8 @@
         </p:nvSpPr>
         <p:spPr>
           <a:xfrm>
-            <a:off x="274320" y="6675120"/>
-            <a:ext cx="3566160" cy="365760"/>
+            <a:off x="320040" y="1371600"/>
+            <a:ext cx="3474720" cy="46597"/>
           </a:xfrm>
           <a:prstGeom prst="rect">
             <a:avLst/>
@@ -3180,83 +3191,33 @@
           <a:bodyPr rtlCol="0" anchor="ctr" wrap="square"/>
           <a:lstStyle/>
           <a:p>
-            <a:pPr algn="l"/>
-            <a:r>
-              <a:rPr sz="900">
-                <a:solidFill>
-                  <a:srgbClr val="B8942F"/>
+            <a:pPr algn="l">
+              <a:lnSpc>
+                <a:spcPct val="130000"/>
+              </a:lnSpc>
+            </a:pPr>
+            <a:r>
+              <a:rPr sz="2800" b="1">
+                <a:solidFill>
+                  <a:srgbClr val="F5F0EB"/>
                 </a:solidFill>
                 <a:latin typeface="Hiragino Sans"/>
               </a:rPr>
-              <a:t>HARMONIC insight</a:t>
-            </a:r>
-          </a:p>
-        </p:txBody>
-      </p:sp>
-      <p:sp>
-        <p:nvSpPr>
-          <p:cNvPr id="4" name="Rounded Rectangle 3"/>
+              <a:t>AIの恩恵、</a:t>
+            </a:r>
+          </a:p>
+        </p:txBody>
+      </p:sp>
+      <p:sp>
+        <p:nvSpPr>
+          <p:cNvPr id="4" name="Rectangle 3"/>
           <p:cNvSpPr/>
           <p:nvPr/>
         </p:nvSpPr>
         <p:spPr>
           <a:xfrm>
-            <a:off x="137160" y="274320"/>
-            <a:ext cx="1920240" cy="365760"/>
-          </a:xfrm>
-          <a:prstGeom prst="roundRect">
-            <a:avLst>
-              <a:gd name="adj" fmla="val 25000"/>
-            </a:avLst>
-          </a:prstGeom>
-          <a:solidFill>
-            <a:srgbClr val="E53935"/>
-          </a:solidFill>
-          <a:ln>
-            <a:noFill/>
-          </a:ln>
-        </p:spPr>
-        <p:style>
-          <a:lnRef idx="1">
-            <a:schemeClr val="accent1"/>
-          </a:lnRef>
-          <a:fillRef idx="3">
-            <a:schemeClr val="accent1"/>
-          </a:fillRef>
-          <a:effectRef idx="2">
-            <a:schemeClr val="accent1"/>
-          </a:effectRef>
-          <a:fontRef idx="minor">
-            <a:schemeClr val="lt1"/>
-          </a:fontRef>
-        </p:style>
-        <p:txBody>
-          <a:bodyPr rtlCol="0" anchor="ctr" wrap="none"/>
-          <a:lstStyle/>
-          <a:p>
-            <a:pPr algn="ctr"/>
-            <a:r>
-              <a:rPr sz="1200" b="1">
-                <a:solidFill>
-                  <a:srgbClr val="FFFFFF"/>
-                </a:solidFill>
-                <a:latin typeface="Hiragino Sans"/>
-              </a:rPr>
-              <a:t>3月18日 発表</a:t>
-            </a:r>
-          </a:p>
-        </p:txBody>
-      </p:sp>
-      <p:sp>
-        <p:nvSpPr>
-          <p:cNvPr id="5" name="Rectangle 4"/>
-          <p:cNvSpPr/>
-          <p:nvPr/>
-        </p:nvSpPr>
-        <p:spPr>
-          <a:xfrm>
-            <a:off x="2148840" y="274320"/>
-            <a:ext cx="1554480" cy="365760"/>
+            <a:off x="320040" y="2057400"/>
+            <a:ext cx="3474720" cy="149778"/>
           </a:xfrm>
           <a:prstGeom prst="rect">
             <a:avLst/>
@@ -3281,19 +3242,98 @@
           </a:fontRef>
         </p:style>
         <p:txBody>
-          <a:bodyPr rtlCol="0" anchor="ctr" wrap="none"/>
-          <a:lstStyle/>
-          <a:p>
-            <a:pPr algn="l"/>
-            <a:r>
-              <a:rPr sz="1100">
-                <a:solidFill>
-                  <a:srgbClr val="A8A29E"/>
+          <a:bodyPr rtlCol="0" anchor="ctr" wrap="square"/>
+          <a:lstStyle/>
+          <a:p>
+            <a:pPr algn="l">
+              <a:lnSpc>
+                <a:spcPct val="130000"/>
+              </a:lnSpc>
+            </a:pPr>
+            <a:r>
+              <a:rPr sz="3000" b="1">
+                <a:solidFill>
+                  <a:srgbClr val="E84D3D"/>
                 </a:solidFill>
                 <a:latin typeface="Hiragino Sans"/>
               </a:rPr>
-              <a:t>Anthropic</a:t>
-            </a:r>
+              <a:t>会社員と</a:t>
+            </a:r>
+          </a:p>
+          <a:p>
+            <a:pPr algn="l">
+              <a:lnSpc>
+                <a:spcPct val="130000"/>
+              </a:lnSpc>
+            </a:pPr>
+            <a:r>
+              <a:rPr sz="3000" b="1">
+                <a:solidFill>
+                  <a:srgbClr val="E84D3D"/>
+                </a:solidFill>
+                <a:latin typeface="Hiragino Sans"/>
+              </a:rPr>
+              <a:t>フリーランスで</a:t>
+            </a:r>
+          </a:p>
+          <a:p>
+            <a:pPr algn="l">
+              <a:lnSpc>
+                <a:spcPct val="130000"/>
+              </a:lnSpc>
+            </a:pPr>
+            <a:r>
+              <a:rPr sz="3000" b="1">
+                <a:solidFill>
+                  <a:srgbClr val="E84D3D"/>
+                </a:solidFill>
+                <a:latin typeface="Hiragino Sans"/>
+              </a:rPr>
+              <a:t>3倍違う。</a:t>
+            </a:r>
+          </a:p>
+        </p:txBody>
+      </p:sp>
+      <p:sp>
+        <p:nvSpPr>
+          <p:cNvPr id="5" name="Rectangle 4"/>
+          <p:cNvSpPr/>
+          <p:nvPr/>
+        </p:nvSpPr>
+        <p:spPr>
+          <a:xfrm>
+            <a:off x="320040" y="3886200"/>
+            <a:ext cx="914400" cy="13716"/>
+          </a:xfrm>
+          <a:prstGeom prst="rect">
+            <a:avLst/>
+          </a:prstGeom>
+          <a:solidFill>
+            <a:srgbClr val="C9A02D"/>
+          </a:solidFill>
+          <a:ln>
+            <a:noFill/>
+          </a:ln>
+        </p:spPr>
+        <p:style>
+          <a:lnRef idx="1">
+            <a:schemeClr val="accent1"/>
+          </a:lnRef>
+          <a:fillRef idx="3">
+            <a:schemeClr val="accent1"/>
+          </a:fillRef>
+          <a:effectRef idx="2">
+            <a:schemeClr val="accent1"/>
+          </a:effectRef>
+          <a:fontRef idx="minor">
+            <a:schemeClr val="lt1"/>
+          </a:fontRef>
+        </p:style>
+        <p:txBody>
+          <a:bodyPr rtlCol="0" anchor="ctr"/>
+          <a:lstStyle/>
+          <a:p>
+            <a:pPr algn="ctr"/>
           </a:p>
         </p:txBody>
       </p:sp>
@@ -3305,8 +3345,8 @@
         </p:nvSpPr>
         <p:spPr>
           <a:xfrm>
-            <a:off x="274320" y="1143000"/>
-            <a:ext cx="3566160" cy="1600200"/>
+            <a:off x="320040" y="4114800"/>
+            <a:ext cx="3474720" cy="39940"/>
           </a:xfrm>
           <a:prstGeom prst="rect">
             <a:avLst/>
@@ -3335,50 +3375,34 @@
           <a:lstStyle/>
           <a:p>
             <a:pPr algn="l">
-              <a:spcAft>
-                <a:spcPts val="400"/>
-              </a:spcAft>
+              <a:lnSpc>
+                <a:spcPct val="130000"/>
+              </a:lnSpc>
             </a:pPr>
             <a:r>
-              <a:rPr sz="2400" b="1">
-                <a:solidFill>
-                  <a:srgbClr val="FFFFFF"/>
+              <a:rPr sz="1200" b="0">
+                <a:solidFill>
+                  <a:srgbClr val="78716C"/>
                 </a:solidFill>
                 <a:latin typeface="Hiragino Sans"/>
               </a:rPr>
-              <a:t>AIの恩恵、</a:t>
+              <a:t>159か国 81,000人の調査が示した</a:t>
             </a:r>
           </a:p>
           <a:p>
             <a:pPr algn="l">
-              <a:spcAft>
-                <a:spcPts val="400"/>
-              </a:spcAft>
+              <a:lnSpc>
+                <a:spcPct val="130000"/>
+              </a:lnSpc>
             </a:pPr>
             <a:r>
-              <a:rPr sz="2400" b="1">
-                <a:solidFill>
-                  <a:srgbClr val="FFFFFF"/>
+              <a:rPr sz="1200" b="0">
+                <a:solidFill>
+                  <a:srgbClr val="78716C"/>
                 </a:solidFill>
                 <a:latin typeface="Hiragino Sans"/>
               </a:rPr>
-              <a:t>会社員と</a:t>
-            </a:r>
-          </a:p>
-          <a:p>
-            <a:pPr algn="l">
-              <a:spcAft>
-                <a:spcPts val="400"/>
-              </a:spcAft>
-            </a:pPr>
-            <a:r>
-              <a:rPr sz="2400" b="1">
-                <a:solidFill>
-                  <a:srgbClr val="FFFFFF"/>
-                </a:solidFill>
-                <a:latin typeface="Hiragino Sans"/>
-              </a:rPr>
-              <a:t>フリーランスで</a:t>
+              <a:t>「自律性」という決定的な差</a:t>
             </a:r>
           </a:p>
         </p:txBody>
@@ -3391,8 +3415,8 @@
         </p:nvSpPr>
         <p:spPr>
           <a:xfrm>
-            <a:off x="274320" y="2971800"/>
-            <a:ext cx="3566160" cy="731520"/>
+            <a:off x="320040" y="6720000"/>
+            <a:ext cx="3474720" cy="14977"/>
           </a:xfrm>
           <a:prstGeom prst="rect">
             <a:avLst/>
@@ -3421,72 +3445,18 @@
           <a:lstStyle/>
           <a:p>
             <a:pPr algn="l">
-              <a:spcAft>
-                <a:spcPts val="400"/>
-              </a:spcAft>
+              <a:lnSpc>
+                <a:spcPct val="130000"/>
+              </a:lnSpc>
             </a:pPr>
             <a:r>
-              <a:rPr sz="3600" b="1">
-                <a:solidFill>
-                  <a:srgbClr val="E53935"/>
+              <a:rPr sz="900" b="0">
+                <a:solidFill>
+                  <a:srgbClr val="C9A02D"/>
                 </a:solidFill>
                 <a:latin typeface="Hiragino Sans"/>
               </a:rPr>
-              <a:t>3倍違う</a:t>
-            </a:r>
-          </a:p>
-        </p:txBody>
-      </p:sp>
-      <p:sp>
-        <p:nvSpPr>
-          <p:cNvPr id="8" name="Rectangle 7"/>
-          <p:cNvSpPr/>
-          <p:nvPr/>
-        </p:nvSpPr>
-        <p:spPr>
-          <a:xfrm>
-            <a:off x="274320" y="4114800"/>
-            <a:ext cx="3566160" cy="457200"/>
-          </a:xfrm>
-          <a:prstGeom prst="rect">
-            <a:avLst/>
-          </a:prstGeom>
-          <a:noFill/>
-          <a:ln>
-            <a:noFill/>
-          </a:ln>
-        </p:spPr>
-        <p:style>
-          <a:lnRef idx="1">
-            <a:schemeClr val="accent1"/>
-          </a:lnRef>
-          <a:fillRef idx="3">
-            <a:schemeClr val="accent1"/>
-          </a:fillRef>
-          <a:effectRef idx="2">
-            <a:schemeClr val="accent1"/>
-          </a:effectRef>
-          <a:fontRef idx="minor">
-            <a:schemeClr val="lt1"/>
-          </a:fontRef>
-        </p:style>
-        <p:txBody>
-          <a:bodyPr rtlCol="0" anchor="ctr" wrap="square"/>
-          <a:lstStyle/>
-          <a:p>
-            <a:pPr algn="l">
-              <a:spcAft>
-                <a:spcPts val="400"/>
-              </a:spcAft>
-            </a:pPr>
-            <a:r>
-              <a:rPr sz="1200" b="0">
-                <a:solidFill>
-                  <a:srgbClr val="57534E"/>
-                </a:solidFill>
-                <a:latin typeface="Hiragino Sans"/>
-              </a:rPr>
-              <a:t>81,000人調査が示した決定的な差</a:t>
+              <a:t>HARMONIC insight</a:t>
             </a:r>
           </a:p>
         </p:txBody>
@@ -3505,7 +3475,7 @@
     <p:bg>
       <p:bgPr>
         <a:solidFill>
-          <a:srgbClr val="1C1917"/>
+          <a:srgbClr val="12100E"/>
         </a:solidFill>
         <a:effectLst/>
       </p:bgPr>
@@ -3525,51 +3495,8 @@
         </p:nvSpPr>
         <p:spPr>
           <a:xfrm>
-            <a:off x="0" y="0"/>
-            <a:ext cx="4114800" cy="54864"/>
-          </a:xfrm>
-          <a:prstGeom prst="rect">
-            <a:avLst/>
-          </a:prstGeom>
-          <a:solidFill>
-            <a:srgbClr val="B8942F"/>
-          </a:solidFill>
-          <a:ln>
-            <a:noFill/>
-          </a:ln>
-        </p:spPr>
-        <p:style>
-          <a:lnRef idx="1">
-            <a:schemeClr val="accent1"/>
-          </a:lnRef>
-          <a:fillRef idx="3">
-            <a:schemeClr val="accent1"/>
-          </a:fillRef>
-          <a:effectRef idx="2">
-            <a:schemeClr val="accent1"/>
-          </a:effectRef>
-          <a:fontRef idx="minor">
-            <a:schemeClr val="lt1"/>
-          </a:fontRef>
-        </p:style>
-        <p:txBody>
-          <a:bodyPr rtlCol="0" anchor="ctr"/>
-          <a:lstStyle/>
-          <a:p>
-            <a:pPr algn="ctr"/>
-          </a:p>
-        </p:txBody>
-      </p:sp>
-      <p:sp>
-        <p:nvSpPr>
-          <p:cNvPr id="3" name="Rectangle 2"/>
-          <p:cNvSpPr/>
-          <p:nvPr/>
-        </p:nvSpPr>
-        <p:spPr>
-          <a:xfrm>
-            <a:off x="274320" y="6675120"/>
-            <a:ext cx="3566160" cy="365760"/>
+            <a:off x="320040" y="548640"/>
+            <a:ext cx="3474720" cy="23298"/>
           </a:xfrm>
           <a:prstGeom prst="rect">
             <a:avLst/>
@@ -3597,83 +3524,33 @@
           <a:bodyPr rtlCol="0" anchor="ctr" wrap="square"/>
           <a:lstStyle/>
           <a:p>
-            <a:pPr algn="l"/>
-            <a:r>
-              <a:rPr sz="900">
-                <a:solidFill>
-                  <a:srgbClr val="B8942F"/>
+            <a:pPr algn="l">
+              <a:lnSpc>
+                <a:spcPct val="130000"/>
+              </a:lnSpc>
+            </a:pPr>
+            <a:r>
+              <a:rPr sz="1400" b="0">
+                <a:solidFill>
+                  <a:srgbClr val="78716C"/>
                 </a:solidFill>
                 <a:latin typeface="Hiragino Sans"/>
               </a:rPr>
-              <a:t>HARMONIC insight</a:t>
-            </a:r>
-          </a:p>
-        </p:txBody>
-      </p:sp>
-      <p:sp>
-        <p:nvSpPr>
-          <p:cNvPr id="4" name="Rounded Rectangle 3"/>
+              <a:t>レポートの衝撃的なデータ</a:t>
+            </a:r>
+          </a:p>
+        </p:txBody>
+      </p:sp>
+      <p:sp>
+        <p:nvSpPr>
+          <p:cNvPr id="3" name="Rectangle 2"/>
           <p:cNvSpPr/>
           <p:nvPr/>
         </p:nvSpPr>
         <p:spPr>
           <a:xfrm>
-            <a:off x="137160" y="274320"/>
-            <a:ext cx="1920240" cy="365760"/>
-          </a:xfrm>
-          <a:prstGeom prst="roundRect">
-            <a:avLst>
-              <a:gd name="adj" fmla="val 25000"/>
-            </a:avLst>
-          </a:prstGeom>
-          <a:solidFill>
-            <a:srgbClr val="E53935"/>
-          </a:solidFill>
-          <a:ln>
-            <a:noFill/>
-          </a:ln>
-        </p:spPr>
-        <p:style>
-          <a:lnRef idx="1">
-            <a:schemeClr val="accent1"/>
-          </a:lnRef>
-          <a:fillRef idx="3">
-            <a:schemeClr val="accent1"/>
-          </a:fillRef>
-          <a:effectRef idx="2">
-            <a:schemeClr val="accent1"/>
-          </a:effectRef>
-          <a:fontRef idx="minor">
-            <a:schemeClr val="lt1"/>
-          </a:fontRef>
-        </p:style>
-        <p:txBody>
-          <a:bodyPr rtlCol="0" anchor="ctr" wrap="none"/>
-          <a:lstStyle/>
-          <a:p>
-            <a:pPr algn="ctr"/>
-            <a:r>
-              <a:rPr sz="1200" b="1">
-                <a:solidFill>
-                  <a:srgbClr val="FFFFFF"/>
-                </a:solidFill>
-                <a:latin typeface="Hiragino Sans"/>
-              </a:rPr>
-              <a:t>3月18日 発表</a:t>
-            </a:r>
-          </a:p>
-        </p:txBody>
-      </p:sp>
-      <p:sp>
-        <p:nvSpPr>
-          <p:cNvPr id="5" name="Rectangle 4"/>
-          <p:cNvSpPr/>
-          <p:nvPr/>
-        </p:nvSpPr>
-        <p:spPr>
-          <a:xfrm>
-            <a:off x="2148840" y="274320"/>
-            <a:ext cx="1554480" cy="365760"/>
+            <a:off x="320040" y="914400"/>
+            <a:ext cx="3474720" cy="66568"/>
           </a:xfrm>
           <a:prstGeom prst="rect">
             <a:avLst/>
@@ -3698,32 +3575,95 @@
           </a:fontRef>
         </p:style>
         <p:txBody>
-          <a:bodyPr rtlCol="0" anchor="ctr" wrap="none"/>
-          <a:lstStyle/>
-          <a:p>
-            <a:pPr algn="l"/>
-            <a:r>
-              <a:rPr sz="1100">
-                <a:solidFill>
-                  <a:srgbClr val="A8A29E"/>
+          <a:bodyPr rtlCol="0" anchor="ctr" wrap="square"/>
+          <a:lstStyle/>
+          <a:p>
+            <a:pPr algn="l">
+              <a:lnSpc>
+                <a:spcPct val="130000"/>
+              </a:lnSpc>
+            </a:pPr>
+            <a:r>
+              <a:rPr sz="2000" b="1">
+                <a:solidFill>
+                  <a:srgbClr val="F5F0EB"/>
                 </a:solidFill>
                 <a:latin typeface="Hiragino Sans"/>
               </a:rPr>
-              <a:t>Anthropic</a:t>
-            </a:r>
-          </a:p>
-        </p:txBody>
-      </p:sp>
-      <p:sp>
-        <p:nvSpPr>
-          <p:cNvPr id="6" name="Rectangle 5"/>
+              <a:t>AIで経済的恩恵を</a:t>
+            </a:r>
+          </a:p>
+          <a:p>
+            <a:pPr algn="l">
+              <a:lnSpc>
+                <a:spcPct val="130000"/>
+              </a:lnSpc>
+            </a:pPr>
+            <a:r>
+              <a:rPr sz="2000" b="1">
+                <a:solidFill>
+                  <a:srgbClr val="F5F0EB"/>
+                </a:solidFill>
+                <a:latin typeface="Hiragino Sans"/>
+              </a:rPr>
+              <a:t>感じている人の割合</a:t>
+            </a:r>
+          </a:p>
+        </p:txBody>
+      </p:sp>
+      <p:sp>
+        <p:nvSpPr>
+          <p:cNvPr id="4" name="Rectangle 3"/>
           <p:cNvSpPr/>
           <p:nvPr/>
         </p:nvSpPr>
         <p:spPr>
           <a:xfrm>
-            <a:off x="274320" y="822960"/>
-            <a:ext cx="3566160" cy="731520"/>
+            <a:off x="320040" y="1600200"/>
+            <a:ext cx="914400" cy="13716"/>
+          </a:xfrm>
+          <a:prstGeom prst="rect">
+            <a:avLst/>
+          </a:prstGeom>
+          <a:solidFill>
+            <a:srgbClr val="C9A02D"/>
+          </a:solidFill>
+          <a:ln>
+            <a:noFill/>
+          </a:ln>
+        </p:spPr>
+        <p:style>
+          <a:lnRef idx="1">
+            <a:schemeClr val="accent1"/>
+          </a:lnRef>
+          <a:fillRef idx="3">
+            <a:schemeClr val="accent1"/>
+          </a:fillRef>
+          <a:effectRef idx="2">
+            <a:schemeClr val="accent1"/>
+          </a:effectRef>
+          <a:fontRef idx="minor">
+            <a:schemeClr val="lt1"/>
+          </a:fontRef>
+        </p:style>
+        <p:txBody>
+          <a:bodyPr rtlCol="0" anchor="ctr"/>
+          <a:lstStyle/>
+          <a:p>
+            <a:pPr algn="ctr"/>
+          </a:p>
+        </p:txBody>
+      </p:sp>
+      <p:sp>
+        <p:nvSpPr>
+          <p:cNvPr id="5" name="Rectangle 4"/>
+          <p:cNvSpPr/>
+          <p:nvPr/>
+        </p:nvSpPr>
+        <p:spPr>
+          <a:xfrm>
+            <a:off x="320040" y="1828800"/>
+            <a:ext cx="3474720" cy="76809"/>
           </a:xfrm>
           <a:prstGeom prst="rect">
             <a:avLst/>
@@ -3748,236 +3688,41 @@
           </a:fontRef>
         </p:style>
         <p:txBody>
-          <a:bodyPr rtlCol="0" anchor="ctr" wrap="square"/>
-          <a:lstStyle/>
-          <a:p>
-            <a:pPr algn="l">
-              <a:spcAft>
-                <a:spcPts val="400"/>
-              </a:spcAft>
-            </a:pPr>
-            <a:r>
-              <a:rPr sz="1800" b="0">
-                <a:solidFill>
-                  <a:srgbClr val="A8A29E"/>
+          <a:bodyPr rtlCol="0" anchor="ctr" wrap="none"/>
+          <a:lstStyle/>
+          <a:p>
+            <a:pPr algn="l"/>
+            <a:r>
+              <a:rPr sz="5600" b="1">
+                <a:solidFill>
+                  <a:srgbClr val="6BD47B"/>
                 </a:solidFill>
                 <a:latin typeface="Hiragino Sans"/>
               </a:rPr>
-              <a:t>AIで経済的恩恵を</a:t>
-            </a:r>
-          </a:p>
-          <a:p>
-            <a:pPr algn="l">
-              <a:spcAft>
-                <a:spcPts val="400"/>
-              </a:spcAft>
-            </a:pPr>
-            <a:r>
-              <a:rPr sz="1800" b="0">
-                <a:solidFill>
-                  <a:srgbClr val="A8A29E"/>
+              <a:t>47</a:t>
+            </a:r>
+            <a:r>
+              <a:rPr sz="2800" b="1">
+                <a:solidFill>
+                  <a:srgbClr val="6BD47B"/>
                 </a:solidFill>
                 <a:latin typeface="Hiragino Sans"/>
               </a:rPr>
-              <a:t>感じている人の割合</a:t>
-            </a:r>
-          </a:p>
-        </p:txBody>
-      </p:sp>
-      <p:sp>
-        <p:nvSpPr>
-          <p:cNvPr id="7" name="Rounded Rectangle 6"/>
+              <a:t> %</a:t>
+            </a:r>
+          </a:p>
+        </p:txBody>
+      </p:sp>
+      <p:sp>
+        <p:nvSpPr>
+          <p:cNvPr id="6" name="Rectangle 5"/>
           <p:cNvSpPr/>
           <p:nvPr/>
         </p:nvSpPr>
         <p:spPr>
           <a:xfrm>
-            <a:off x="274320" y="1828800"/>
-            <a:ext cx="1737360" cy="960120"/>
-          </a:xfrm>
-          <a:prstGeom prst="roundRect">
-            <a:avLst>
-              <a:gd name="adj" fmla="val 8000"/>
-            </a:avLst>
-          </a:prstGeom>
-          <a:solidFill>
-            <a:srgbClr val="2C2723"/>
-          </a:solidFill>
-          <a:ln>
-            <a:noFill/>
-          </a:ln>
-        </p:spPr>
-        <p:style>
-          <a:lnRef idx="1">
-            <a:schemeClr val="accent1"/>
-          </a:lnRef>
-          <a:fillRef idx="3">
-            <a:schemeClr val="accent1"/>
-          </a:fillRef>
-          <a:effectRef idx="2">
-            <a:schemeClr val="accent1"/>
-          </a:effectRef>
-          <a:fontRef idx="minor">
-            <a:schemeClr val="lt1"/>
-          </a:fontRef>
-        </p:style>
-        <p:txBody>
-          <a:bodyPr rtlCol="0" anchor="ctr" wrap="square"/>
-          <a:lstStyle/>
-          <a:p>
-            <a:pPr algn="ctr"/>
-            <a:r>
-              <a:rPr sz="3600" b="1">
-                <a:solidFill>
-                  <a:srgbClr val="66BB6A"/>
-                </a:solidFill>
-                <a:latin typeface="Hiragino Sans"/>
-              </a:rPr>
-              <a:t>47%</a:t>
-            </a:r>
-          </a:p>
-          <a:p>
-            <a:pPr algn="ctr"/>
-            <a:r>
-              <a:rPr sz="1000">
-                <a:solidFill>
-                  <a:srgbClr val="A8A29E"/>
-                </a:solidFill>
-                <a:latin typeface="Hiragino Sans"/>
-              </a:rPr>
-              <a:t>独立事業者</a:t>
-            </a:r>
-          </a:p>
-        </p:txBody>
-      </p:sp>
-      <p:sp>
-        <p:nvSpPr>
-          <p:cNvPr id="8" name="Oval 7"/>
-          <p:cNvSpPr/>
-          <p:nvPr/>
-        </p:nvSpPr>
-        <p:spPr>
-          <a:xfrm>
-            <a:off x="1851660" y="2148840"/>
-            <a:ext cx="365760" cy="365760"/>
-          </a:xfrm>
-          <a:prstGeom prst="ellipse">
-            <a:avLst/>
-          </a:prstGeom>
-          <a:solidFill>
-            <a:srgbClr val="E53935"/>
-          </a:solidFill>
-          <a:ln>
-            <a:noFill/>
-          </a:ln>
-        </p:spPr>
-        <p:style>
-          <a:lnRef idx="1">
-            <a:schemeClr val="accent1"/>
-          </a:lnRef>
-          <a:fillRef idx="3">
-            <a:schemeClr val="accent1"/>
-          </a:fillRef>
-          <a:effectRef idx="2">
-            <a:schemeClr val="accent1"/>
-          </a:effectRef>
-          <a:fontRef idx="minor">
-            <a:schemeClr val="lt1"/>
-          </a:fontRef>
-        </p:style>
-        <p:txBody>
-          <a:bodyPr rtlCol="0" anchor="ctr"/>
-          <a:lstStyle/>
-          <a:p>
-            <a:pPr algn="ctr"/>
-            <a:r>
-              <a:rPr sz="1100" b="1">
-                <a:solidFill>
-                  <a:srgbClr val="FFFFFF"/>
-                </a:solidFill>
-                <a:latin typeface="Hiragino Sans"/>
-              </a:rPr>
-              <a:t>VS</a:t>
-            </a:r>
-          </a:p>
-        </p:txBody>
-      </p:sp>
-      <p:sp>
-        <p:nvSpPr>
-          <p:cNvPr id="9" name="Rounded Rectangle 8"/>
-          <p:cNvSpPr/>
-          <p:nvPr/>
-        </p:nvSpPr>
-        <p:spPr>
-          <a:xfrm>
-            <a:off x="2103120" y="1828800"/>
-            <a:ext cx="1737360" cy="960120"/>
-          </a:xfrm>
-          <a:prstGeom prst="roundRect">
-            <a:avLst>
-              <a:gd name="adj" fmla="val 8000"/>
-            </a:avLst>
-          </a:prstGeom>
-          <a:solidFill>
-            <a:srgbClr val="2C2723"/>
-          </a:solidFill>
-          <a:ln>
-            <a:noFill/>
-          </a:ln>
-        </p:spPr>
-        <p:style>
-          <a:lnRef idx="1">
-            <a:schemeClr val="accent1"/>
-          </a:lnRef>
-          <a:fillRef idx="3">
-            <a:schemeClr val="accent1"/>
-          </a:fillRef>
-          <a:effectRef idx="2">
-            <a:schemeClr val="accent1"/>
-          </a:effectRef>
-          <a:fontRef idx="minor">
-            <a:schemeClr val="lt1"/>
-          </a:fontRef>
-        </p:style>
-        <p:txBody>
-          <a:bodyPr rtlCol="0" anchor="ctr" wrap="square"/>
-          <a:lstStyle/>
-          <a:p>
-            <a:pPr algn="ctr"/>
-            <a:r>
-              <a:rPr sz="3600" b="1">
-                <a:solidFill>
-                  <a:srgbClr val="E53935"/>
-                </a:solidFill>
-                <a:latin typeface="Hiragino Sans"/>
-              </a:rPr>
-              <a:t>14%</a:t>
-            </a:r>
-          </a:p>
-          <a:p>
-            <a:pPr algn="ctr"/>
-            <a:r>
-              <a:rPr sz="1000">
-                <a:solidFill>
-                  <a:srgbClr val="A8A29E"/>
-                </a:solidFill>
-                <a:latin typeface="Hiragino Sans"/>
-              </a:rPr>
-              <a:t>企業従業員</a:t>
-            </a:r>
-          </a:p>
-        </p:txBody>
-      </p:sp>
-      <p:sp>
-        <p:nvSpPr>
-          <p:cNvPr id="10" name="Rectangle 9"/>
-          <p:cNvSpPr/>
-          <p:nvPr/>
-        </p:nvSpPr>
-        <p:spPr>
-          <a:xfrm>
-            <a:off x="274320" y="3200400"/>
-            <a:ext cx="3566160" cy="548640"/>
+            <a:off x="320040" y="2743200"/>
+            <a:ext cx="3474720" cy="21634"/>
           </a:xfrm>
           <a:prstGeom prst="rect">
             <a:avLst/>
@@ -4005,76 +3750,33 @@
           <a:bodyPr rtlCol="0" anchor="ctr" wrap="square"/>
           <a:lstStyle/>
           <a:p>
-            <a:pPr algn="ctr">
-              <a:spcAft>
-                <a:spcPts val="400"/>
-              </a:spcAft>
+            <a:pPr algn="l">
+              <a:lnSpc>
+                <a:spcPct val="130000"/>
+              </a:lnSpc>
             </a:pPr>
             <a:r>
-              <a:rPr sz="2400" b="1">
-                <a:solidFill>
-                  <a:srgbClr val="B8942F"/>
+              <a:rPr sz="1300" b="0">
+                <a:solidFill>
+                  <a:srgbClr val="78716C"/>
                 </a:solidFill>
                 <a:latin typeface="Hiragino Sans"/>
               </a:rPr>
-              <a:t>3.4倍の差</a:t>
-            </a:r>
-          </a:p>
-        </p:txBody>
-      </p:sp>
-      <p:sp>
-        <p:nvSpPr>
-          <p:cNvPr id="11" name="Rectangle 10"/>
+              <a:t>独立事業者・フリーランス</a:t>
+            </a:r>
+          </a:p>
+        </p:txBody>
+      </p:sp>
+      <p:sp>
+        <p:nvSpPr>
+          <p:cNvPr id="7" name="Rectangle 6"/>
           <p:cNvSpPr/>
           <p:nvPr/>
         </p:nvSpPr>
         <p:spPr>
           <a:xfrm>
-            <a:off x="274320" y="3886200"/>
-            <a:ext cx="3566160" cy="18288"/>
-          </a:xfrm>
-          <a:prstGeom prst="rect">
-            <a:avLst/>
-          </a:prstGeom>
-          <a:solidFill>
-            <a:srgbClr val="B8942F"/>
-          </a:solidFill>
-          <a:ln>
-            <a:noFill/>
-          </a:ln>
-        </p:spPr>
-        <p:style>
-          <a:lnRef idx="1">
-            <a:schemeClr val="accent1"/>
-          </a:lnRef>
-          <a:fillRef idx="3">
-            <a:schemeClr val="accent1"/>
-          </a:fillRef>
-          <a:effectRef idx="2">
-            <a:schemeClr val="accent1"/>
-          </a:effectRef>
-          <a:fontRef idx="minor">
-            <a:schemeClr val="lt1"/>
-          </a:fontRef>
-        </p:style>
-        <p:txBody>
-          <a:bodyPr rtlCol="0" anchor="ctr"/>
-          <a:lstStyle/>
-          <a:p>
-            <a:pPr algn="ctr"/>
-          </a:p>
-        </p:txBody>
-      </p:sp>
-      <p:sp>
-        <p:nvSpPr>
-          <p:cNvPr id="12" name="Rectangle 11"/>
-          <p:cNvSpPr/>
-          <p:nvPr/>
-        </p:nvSpPr>
-        <p:spPr>
-          <a:xfrm>
-            <a:off x="274320" y="4114800"/>
-            <a:ext cx="3566160" cy="365760"/>
+            <a:off x="320040" y="3200400"/>
+            <a:ext cx="3474720" cy="76809"/>
           </a:xfrm>
           <a:prstGeom prst="rect">
             <a:avLst/>
@@ -4099,36 +3801,41 @@
           </a:fontRef>
         </p:style>
         <p:txBody>
-          <a:bodyPr rtlCol="0" anchor="ctr" wrap="square"/>
-          <a:lstStyle/>
-          <a:p>
-            <a:pPr algn="l">
-              <a:spcAft>
-                <a:spcPts val="400"/>
-              </a:spcAft>
-            </a:pPr>
-            <a:r>
-              <a:rPr sz="1400" b="0">
-                <a:solidFill>
-                  <a:srgbClr val="A8A29E"/>
+          <a:bodyPr rtlCol="0" anchor="ctr" wrap="none"/>
+          <a:lstStyle/>
+          <a:p>
+            <a:pPr algn="l"/>
+            <a:r>
+              <a:rPr sz="5600" b="1">
+                <a:solidFill>
+                  <a:srgbClr val="E84D3D"/>
                 </a:solidFill>
                 <a:latin typeface="Hiragino Sans"/>
               </a:rPr>
-              <a:t>副業持ち会社員</a:t>
-            </a:r>
-          </a:p>
-        </p:txBody>
-      </p:sp>
-      <p:sp>
-        <p:nvSpPr>
-          <p:cNvPr id="13" name="Rectangle 12"/>
+              <a:t>14</a:t>
+            </a:r>
+            <a:r>
+              <a:rPr sz="2800" b="1">
+                <a:solidFill>
+                  <a:srgbClr val="E84D3D"/>
+                </a:solidFill>
+                <a:latin typeface="Hiragino Sans"/>
+              </a:rPr>
+              <a:t> %</a:t>
+            </a:r>
+          </a:p>
+        </p:txBody>
+      </p:sp>
+      <p:sp>
+        <p:nvSpPr>
+          <p:cNvPr id="8" name="Rectangle 7"/>
           <p:cNvSpPr/>
           <p:nvPr/>
         </p:nvSpPr>
         <p:spPr>
           <a:xfrm>
-            <a:off x="274320" y="4480560"/>
-            <a:ext cx="3566160" cy="548640"/>
+            <a:off x="320040" y="4114800"/>
+            <a:ext cx="3474720" cy="21634"/>
           </a:xfrm>
           <a:prstGeom prst="rect">
             <a:avLst/>
@@ -4156,19 +3863,181 @@
           <a:bodyPr rtlCol="0" anchor="ctr" wrap="square"/>
           <a:lstStyle/>
           <a:p>
-            <a:pPr algn="ctr">
-              <a:spcAft>
-                <a:spcPts val="400"/>
-              </a:spcAft>
+            <a:pPr algn="l">
+              <a:lnSpc>
+                <a:spcPct val="130000"/>
+              </a:lnSpc>
             </a:pPr>
             <a:r>
-              <a:rPr sz="3600" b="1">
-                <a:solidFill>
-                  <a:srgbClr val="FFA726"/>
+              <a:rPr sz="1300" b="0">
+                <a:solidFill>
+                  <a:srgbClr val="78716C"/>
                 </a:solidFill>
                 <a:latin typeface="Hiragino Sans"/>
               </a:rPr>
-              <a:t>58%</a:t>
+              <a:t>企業の従業員</a:t>
+            </a:r>
+          </a:p>
+        </p:txBody>
+      </p:sp>
+      <p:sp>
+        <p:nvSpPr>
+          <p:cNvPr id="9" name="Rectangle 8"/>
+          <p:cNvSpPr/>
+          <p:nvPr/>
+        </p:nvSpPr>
+        <p:spPr>
+          <a:xfrm>
+            <a:off x="320040" y="4571040"/>
+            <a:ext cx="3474720" cy="36612"/>
+          </a:xfrm>
+          <a:prstGeom prst="rect">
+            <a:avLst/>
+          </a:prstGeom>
+          <a:noFill/>
+          <a:ln>
+            <a:noFill/>
+          </a:ln>
+        </p:spPr>
+        <p:style>
+          <a:lnRef idx="1">
+            <a:schemeClr val="accent1"/>
+          </a:lnRef>
+          <a:fillRef idx="3">
+            <a:schemeClr val="accent1"/>
+          </a:fillRef>
+          <a:effectRef idx="2">
+            <a:schemeClr val="accent1"/>
+          </a:effectRef>
+          <a:fontRef idx="minor">
+            <a:schemeClr val="lt1"/>
+          </a:fontRef>
+        </p:style>
+        <p:txBody>
+          <a:bodyPr rtlCol="0" anchor="ctr" wrap="square"/>
+          <a:lstStyle/>
+          <a:p>
+            <a:pPr algn="l">
+              <a:lnSpc>
+                <a:spcPct val="130000"/>
+              </a:lnSpc>
+            </a:pPr>
+            <a:r>
+              <a:rPr sz="2200" b="1">
+                <a:solidFill>
+                  <a:srgbClr val="C9A02D"/>
+                </a:solidFill>
+                <a:latin typeface="Hiragino Sans"/>
+              </a:rPr>
+              <a:t>3.4倍の差</a:t>
+            </a:r>
+          </a:p>
+        </p:txBody>
+      </p:sp>
+      <p:sp>
+        <p:nvSpPr>
+          <p:cNvPr id="10" name="Rectangle 9"/>
+          <p:cNvSpPr/>
+          <p:nvPr/>
+        </p:nvSpPr>
+        <p:spPr>
+          <a:xfrm>
+            <a:off x="320040" y="6400000"/>
+            <a:ext cx="3474720" cy="13313"/>
+          </a:xfrm>
+          <a:prstGeom prst="rect">
+            <a:avLst/>
+          </a:prstGeom>
+          <a:noFill/>
+          <a:ln>
+            <a:noFill/>
+          </a:ln>
+        </p:spPr>
+        <p:style>
+          <a:lnRef idx="1">
+            <a:schemeClr val="accent1"/>
+          </a:lnRef>
+          <a:fillRef idx="3">
+            <a:schemeClr val="accent1"/>
+          </a:fillRef>
+          <a:effectRef idx="2">
+            <a:schemeClr val="accent1"/>
+          </a:effectRef>
+          <a:fontRef idx="minor">
+            <a:schemeClr val="lt1"/>
+          </a:fontRef>
+        </p:style>
+        <p:txBody>
+          <a:bodyPr rtlCol="0" anchor="ctr" wrap="square"/>
+          <a:lstStyle/>
+          <a:p>
+            <a:pPr algn="l">
+              <a:lnSpc>
+                <a:spcPct val="130000"/>
+              </a:lnSpc>
+            </a:pPr>
+            <a:r>
+              <a:rPr sz="800" b="0">
+                <a:solidFill>
+                  <a:srgbClr val="4A4540"/>
+                </a:solidFill>
+                <a:latin typeface="Hiragino Sans"/>
+              </a:rPr>
+              <a:t>出典: Anthropic "What 81,000 people want from AI"</a:t>
+            </a:r>
+          </a:p>
+        </p:txBody>
+      </p:sp>
+      <p:sp>
+        <p:nvSpPr>
+          <p:cNvPr id="11" name="Rectangle 10"/>
+          <p:cNvSpPr/>
+          <p:nvPr/>
+        </p:nvSpPr>
+        <p:spPr>
+          <a:xfrm>
+            <a:off x="320040" y="6720000"/>
+            <a:ext cx="3474720" cy="14977"/>
+          </a:xfrm>
+          <a:prstGeom prst="rect">
+            <a:avLst/>
+          </a:prstGeom>
+          <a:noFill/>
+          <a:ln>
+            <a:noFill/>
+          </a:ln>
+        </p:spPr>
+        <p:style>
+          <a:lnRef idx="1">
+            <a:schemeClr val="accent1"/>
+          </a:lnRef>
+          <a:fillRef idx="3">
+            <a:schemeClr val="accent1"/>
+          </a:fillRef>
+          <a:effectRef idx="2">
+            <a:schemeClr val="accent1"/>
+          </a:effectRef>
+          <a:fontRef idx="minor">
+            <a:schemeClr val="lt1"/>
+          </a:fontRef>
+        </p:style>
+        <p:txBody>
+          <a:bodyPr rtlCol="0" anchor="ctr" wrap="square"/>
+          <a:lstStyle/>
+          <a:p>
+            <a:pPr algn="l">
+              <a:lnSpc>
+                <a:spcPct val="130000"/>
+              </a:lnSpc>
+            </a:pPr>
+            <a:r>
+              <a:rPr sz="900" b="0">
+                <a:solidFill>
+                  <a:srgbClr val="C9A02D"/>
+                </a:solidFill>
+                <a:latin typeface="Hiragino Sans"/>
+              </a:rPr>
+              <a:t>HARMONIC insight</a:t>
             </a:r>
           </a:p>
         </p:txBody>
@@ -4187,7 +4056,7 @@
     <p:bg>
       <p:bgPr>
         <a:solidFill>
-          <a:srgbClr val="1C1917"/>
+          <a:srgbClr val="12100E"/>
         </a:solidFill>
         <a:effectLst/>
       </p:bgPr>
@@ -4207,14 +4076,14 @@
         </p:nvSpPr>
         <p:spPr>
           <a:xfrm>
-            <a:off x="0" y="0"/>
-            <a:ext cx="4114800" cy="54864"/>
+            <a:off x="0" y="1143000"/>
+            <a:ext cx="36576" cy="3200400"/>
           </a:xfrm>
           <a:prstGeom prst="rect">
             <a:avLst/>
           </a:prstGeom>
           <a:solidFill>
-            <a:srgbClr val="B8942F"/>
+            <a:srgbClr val="C9A02D"/>
           </a:solidFill>
           <a:ln>
             <a:noFill/>
@@ -4250,8 +4119,8 @@
         </p:nvSpPr>
         <p:spPr>
           <a:xfrm>
-            <a:off x="274320" y="6675120"/>
-            <a:ext cx="3566160" cy="365760"/>
+            <a:off x="320040" y="1143000"/>
+            <a:ext cx="3474720" cy="53254"/>
           </a:xfrm>
           <a:prstGeom prst="rect">
             <a:avLst/>
@@ -4279,15 +4148,35 @@
           <a:bodyPr rtlCol="0" anchor="ctr" wrap="square"/>
           <a:lstStyle/>
           <a:p>
-            <a:pPr algn="l"/>
-            <a:r>
-              <a:rPr sz="900">
-                <a:solidFill>
-                  <a:srgbClr val="B8942F"/>
+            <a:pPr algn="l">
+              <a:lnSpc>
+                <a:spcPct val="130000"/>
+              </a:lnSpc>
+            </a:pPr>
+            <a:r>
+              <a:rPr sz="1600" b="0">
+                <a:solidFill>
+                  <a:srgbClr val="78716C"/>
                 </a:solidFill>
                 <a:latin typeface="Hiragino Sans"/>
               </a:rPr>
-              <a:t>HARMONIC insight</a:t>
+              <a:t>レポートはさらに</a:t>
+            </a:r>
+          </a:p>
+          <a:p>
+            <a:pPr algn="l">
+              <a:lnSpc>
+                <a:spcPct val="130000"/>
+              </a:lnSpc>
+            </a:pPr>
+            <a:r>
+              <a:rPr sz="1600" b="0">
+                <a:solidFill>
+                  <a:srgbClr val="78716C"/>
+                </a:solidFill>
+                <a:latin typeface="Hiragino Sans"/>
+              </a:rPr>
+              <a:t>面白い数字を出した</a:t>
             </a:r>
           </a:p>
         </p:txBody>
@@ -4300,8 +4189,8 @@
         </p:nvSpPr>
         <p:spPr>
           <a:xfrm>
-            <a:off x="274320" y="1371600"/>
-            <a:ext cx="3566160" cy="1371600"/>
+            <a:off x="320040" y="1828800"/>
+            <a:ext cx="3474720" cy="86538"/>
           </a:xfrm>
           <a:prstGeom prst="rect">
             <a:avLst/>
@@ -4330,34 +4219,34 @@
           <a:lstStyle/>
           <a:p>
             <a:pPr algn="l">
-              <a:spcAft>
-                <a:spcPts val="400"/>
-              </a:spcAft>
+              <a:lnSpc>
+                <a:spcPct val="130000"/>
+              </a:lnSpc>
             </a:pPr>
             <a:r>
-              <a:rPr sz="2400" b="1">
-                <a:solidFill>
-                  <a:srgbClr val="FFFFFF"/>
+              <a:rPr sz="2600" b="1">
+                <a:solidFill>
+                  <a:srgbClr val="F5F0EB"/>
                 </a:solidFill>
                 <a:latin typeface="Hiragino Sans"/>
               </a:rPr>
-              <a:t>AIの恩恵は</a:t>
+              <a:t>副業を持つ</a:t>
             </a:r>
           </a:p>
           <a:p>
             <a:pPr algn="l">
-              <a:spcAft>
-                <a:spcPts val="400"/>
-              </a:spcAft>
+              <a:lnSpc>
+                <a:spcPct val="130000"/>
+              </a:lnSpc>
             </a:pPr>
             <a:r>
-              <a:rPr sz="2400" b="1">
-                <a:solidFill>
-                  <a:srgbClr val="FFFFFF"/>
+              <a:rPr sz="2600" b="1">
+                <a:solidFill>
+                  <a:srgbClr val="F5F0EB"/>
                 </a:solidFill>
                 <a:latin typeface="Hiragino Sans"/>
               </a:rPr>
-              <a:t>能力で決まらない</a:t>
+              <a:t>会社員</a:t>
             </a:r>
           </a:p>
         </p:txBody>
@@ -4370,51 +4259,8 @@
         </p:nvSpPr>
         <p:spPr>
           <a:xfrm>
-            <a:off x="274320" y="2971800"/>
-            <a:ext cx="3566160" cy="18288"/>
-          </a:xfrm>
-          <a:prstGeom prst="rect">
-            <a:avLst/>
-          </a:prstGeom>
-          <a:solidFill>
-            <a:srgbClr val="B8942F"/>
-          </a:solidFill>
-          <a:ln>
-            <a:noFill/>
-          </a:ln>
-        </p:spPr>
-        <p:style>
-          <a:lnRef idx="1">
-            <a:schemeClr val="accent1"/>
-          </a:lnRef>
-          <a:fillRef idx="3">
-            <a:schemeClr val="accent1"/>
-          </a:fillRef>
-          <a:effectRef idx="2">
-            <a:schemeClr val="accent1"/>
-          </a:effectRef>
-          <a:fontRef idx="minor">
-            <a:schemeClr val="lt1"/>
-          </a:fontRef>
-        </p:style>
-        <p:txBody>
-          <a:bodyPr rtlCol="0" anchor="ctr"/>
-          <a:lstStyle/>
-          <a:p>
-            <a:pPr algn="ctr"/>
-          </a:p>
-        </p:txBody>
-      </p:sp>
-      <p:sp>
-        <p:nvSpPr>
-          <p:cNvPr id="6" name="Rectangle 5"/>
-          <p:cNvSpPr/>
-          <p:nvPr/>
-        </p:nvSpPr>
-        <p:spPr>
-          <a:xfrm>
-            <a:off x="274320" y="3200400"/>
-            <a:ext cx="3566160" cy="914400"/>
+            <a:off x="320040" y="2743200"/>
+            <a:ext cx="3474720" cy="82296"/>
           </a:xfrm>
           <a:prstGeom prst="rect">
             <a:avLst/>
@@ -4439,23 +4285,71 @@
           </a:fontRef>
         </p:style>
         <p:txBody>
-          <a:bodyPr rtlCol="0" anchor="ctr" wrap="square"/>
-          <a:lstStyle/>
-          <a:p>
-            <a:pPr algn="l">
-              <a:spcAft>
-                <a:spcPts val="400"/>
-              </a:spcAft>
-            </a:pPr>
-            <a:r>
-              <a:rPr sz="2800" b="1">
-                <a:solidFill>
-                  <a:srgbClr val="B8942F"/>
+          <a:bodyPr rtlCol="0" anchor="ctr" wrap="none"/>
+          <a:lstStyle/>
+          <a:p>
+            <a:pPr algn="l"/>
+            <a:r>
+              <a:rPr sz="6000" b="1">
+                <a:solidFill>
+                  <a:srgbClr val="FFB300"/>
                 </a:solidFill>
                 <a:latin typeface="Hiragino Sans"/>
               </a:rPr>
-              <a:t>自律性で決まる</a:t>
-            </a:r>
+              <a:t>58</a:t>
+            </a:r>
+            <a:r>
+              <a:rPr sz="2800" b="1">
+                <a:solidFill>
+                  <a:srgbClr val="FFB300"/>
+                </a:solidFill>
+                <a:latin typeface="Hiragino Sans"/>
+              </a:rPr>
+              <a:t> %</a:t>
+            </a:r>
+          </a:p>
+        </p:txBody>
+      </p:sp>
+      <p:sp>
+        <p:nvSpPr>
+          <p:cNvPr id="6" name="Rectangle 5"/>
+          <p:cNvSpPr/>
+          <p:nvPr/>
+        </p:nvSpPr>
+        <p:spPr>
+          <a:xfrm>
+            <a:off x="320040" y="3886200"/>
+            <a:ext cx="914400" cy="13716"/>
+          </a:xfrm>
+          <a:prstGeom prst="rect">
+            <a:avLst/>
+          </a:prstGeom>
+          <a:solidFill>
+            <a:srgbClr val="C9A02D"/>
+          </a:solidFill>
+          <a:ln>
+            <a:noFill/>
+          </a:ln>
+        </p:spPr>
+        <p:style>
+          <a:lnRef idx="1">
+            <a:schemeClr val="accent1"/>
+          </a:lnRef>
+          <a:fillRef idx="3">
+            <a:schemeClr val="accent1"/>
+          </a:fillRef>
+          <a:effectRef idx="2">
+            <a:schemeClr val="accent1"/>
+          </a:effectRef>
+          <a:fontRef idx="minor">
+            <a:schemeClr val="lt1"/>
+          </a:fontRef>
+        </p:style>
+        <p:txBody>
+          <a:bodyPr rtlCol="0" anchor="ctr"/>
+          <a:lstStyle/>
+          <a:p>
+            <a:pPr algn="ctr"/>
           </a:p>
         </p:txBody>
       </p:sp>
@@ -4467,8 +4361,8 @@
         </p:nvSpPr>
         <p:spPr>
           <a:xfrm>
-            <a:off x="274320" y="4571040"/>
-            <a:ext cx="3566160" cy="914400"/>
+            <a:off x="320040" y="4114800"/>
+            <a:ext cx="3474720" cy="69896"/>
           </a:xfrm>
           <a:prstGeom prst="rect">
             <a:avLst/>
@@ -4497,50 +4391,104 @@
           <a:lstStyle/>
           <a:p>
             <a:pPr algn="l">
-              <a:spcAft>
-                <a:spcPts val="400"/>
-              </a:spcAft>
+              <a:lnSpc>
+                <a:spcPct val="130000"/>
+              </a:lnSpc>
             </a:pPr>
             <a:r>
-              <a:rPr sz="1200" b="0">
-                <a:solidFill>
-                  <a:srgbClr val="57534E"/>
+              <a:rPr sz="1400" b="1">
+                <a:solidFill>
+                  <a:srgbClr val="F5F0EB"/>
                 </a:solidFill>
                 <a:latin typeface="Hiragino Sans"/>
               </a:rPr>
-              <a:t>承認プロセス・セキュリティポリシー…</a:t>
+              <a:t>同じ会社員でも、</a:t>
             </a:r>
           </a:p>
           <a:p>
             <a:pPr algn="l">
-              <a:spcAft>
-                <a:spcPts val="400"/>
-              </a:spcAft>
+              <a:lnSpc>
+                <a:spcPct val="130000"/>
+              </a:lnSpc>
             </a:pPr>
             <a:r>
-              <a:rPr sz="1200" b="0">
-                <a:solidFill>
-                  <a:srgbClr val="57534E"/>
+              <a:rPr sz="1400" b="1">
+                <a:solidFill>
+                  <a:srgbClr val="F5F0EB"/>
                 </a:solidFill>
                 <a:latin typeface="Hiragino Sans"/>
               </a:rPr>
-              <a:t>「まず上に確認します」の間に、</a:t>
+              <a:t>「自分の裁量」があるだけで</a:t>
             </a:r>
           </a:p>
           <a:p>
             <a:pPr algn="l">
-              <a:spcAft>
-                <a:spcPts val="400"/>
-              </a:spcAft>
+              <a:lnSpc>
+                <a:spcPct val="130000"/>
+              </a:lnSpc>
             </a:pPr>
             <a:r>
-              <a:rPr sz="1200" b="0">
-                <a:solidFill>
-                  <a:srgbClr val="57534E"/>
+              <a:rPr sz="1400" b="1">
+                <a:solidFill>
+                  <a:srgbClr val="F5F0EB"/>
                 </a:solidFill>
                 <a:latin typeface="Hiragino Sans"/>
               </a:rPr>
-              <a:t>フリーランスはAIで終わらせている</a:t>
+              <a:t>恩恵が4倍に跳ね上がる</a:t>
+            </a:r>
+          </a:p>
+        </p:txBody>
+      </p:sp>
+      <p:sp>
+        <p:nvSpPr>
+          <p:cNvPr id="8" name="Rectangle 7"/>
+          <p:cNvSpPr/>
+          <p:nvPr/>
+        </p:nvSpPr>
+        <p:spPr>
+          <a:xfrm>
+            <a:off x="320040" y="6720000"/>
+            <a:ext cx="3474720" cy="14977"/>
+          </a:xfrm>
+          <a:prstGeom prst="rect">
+            <a:avLst/>
+          </a:prstGeom>
+          <a:noFill/>
+          <a:ln>
+            <a:noFill/>
+          </a:ln>
+        </p:spPr>
+        <p:style>
+          <a:lnRef idx="1">
+            <a:schemeClr val="accent1"/>
+          </a:lnRef>
+          <a:fillRef idx="3">
+            <a:schemeClr val="accent1"/>
+          </a:fillRef>
+          <a:effectRef idx="2">
+            <a:schemeClr val="accent1"/>
+          </a:effectRef>
+          <a:fontRef idx="minor">
+            <a:schemeClr val="lt1"/>
+          </a:fontRef>
+        </p:style>
+        <p:txBody>
+          <a:bodyPr rtlCol="0" anchor="ctr" wrap="square"/>
+          <a:lstStyle/>
+          <a:p>
+            <a:pPr algn="l">
+              <a:lnSpc>
+                <a:spcPct val="130000"/>
+              </a:lnSpc>
+            </a:pPr>
+            <a:r>
+              <a:rPr sz="900" b="0">
+                <a:solidFill>
+                  <a:srgbClr val="C9A02D"/>
+                </a:solidFill>
+                <a:latin typeface="Hiragino Sans"/>
+              </a:rPr>
+              <a:t>HARMONIC insight</a:t>
             </a:r>
           </a:p>
         </p:txBody>
@@ -4559,7 +4507,7 @@
     <p:bg>
       <p:bgPr>
         <a:solidFill>
-          <a:srgbClr val="1C1917"/>
+          <a:srgbClr val="12100E"/>
         </a:solidFill>
         <a:effectLst/>
       </p:bgPr>
@@ -4579,51 +4527,8 @@
         </p:nvSpPr>
         <p:spPr>
           <a:xfrm>
-            <a:off x="0" y="0"/>
-            <a:ext cx="4114800" cy="54864"/>
-          </a:xfrm>
-          <a:prstGeom prst="rect">
-            <a:avLst/>
-          </a:prstGeom>
-          <a:solidFill>
-            <a:srgbClr val="B8942F"/>
-          </a:solidFill>
-          <a:ln>
-            <a:noFill/>
-          </a:ln>
-        </p:spPr>
-        <p:style>
-          <a:lnRef idx="1">
-            <a:schemeClr val="accent1"/>
-          </a:lnRef>
-          <a:fillRef idx="3">
-            <a:schemeClr val="accent1"/>
-          </a:fillRef>
-          <a:effectRef idx="2">
-            <a:schemeClr val="accent1"/>
-          </a:effectRef>
-          <a:fontRef idx="minor">
-            <a:schemeClr val="lt1"/>
-          </a:fontRef>
-        </p:style>
-        <p:txBody>
-          <a:bodyPr rtlCol="0" anchor="ctr"/>
-          <a:lstStyle/>
-          <a:p>
-            <a:pPr algn="ctr"/>
-          </a:p>
-        </p:txBody>
-      </p:sp>
-      <p:sp>
-        <p:nvSpPr>
-          <p:cNvPr id="3" name="Rectangle 2"/>
-          <p:cNvSpPr/>
-          <p:nvPr/>
-        </p:nvSpPr>
-        <p:spPr>
-          <a:xfrm>
-            <a:off x="274320" y="6675120"/>
-            <a:ext cx="3566160" cy="365760"/>
+            <a:off x="320040" y="1143000"/>
+            <a:ext cx="3474720" cy="36612"/>
           </a:xfrm>
           <a:prstGeom prst="rect">
             <a:avLst/>
@@ -4651,29 +4556,33 @@
           <a:bodyPr rtlCol="0" anchor="ctr" wrap="square"/>
           <a:lstStyle/>
           <a:p>
-            <a:pPr algn="l"/>
-            <a:r>
-              <a:rPr sz="900">
-                <a:solidFill>
-                  <a:srgbClr val="B8942F"/>
+            <a:pPr algn="l">
+              <a:lnSpc>
+                <a:spcPct val="130000"/>
+              </a:lnSpc>
+            </a:pPr>
+            <a:r>
+              <a:rPr sz="2200" b="1">
+                <a:solidFill>
+                  <a:srgbClr val="F5F0EB"/>
                 </a:solidFill>
                 <a:latin typeface="Hiragino Sans"/>
               </a:rPr>
-              <a:t>HARMONIC insight</a:t>
-            </a:r>
-          </a:p>
-        </p:txBody>
-      </p:sp>
-      <p:sp>
-        <p:nvSpPr>
-          <p:cNvPr id="4" name="Rectangle 3"/>
+              <a:t>日本企業の</a:t>
+            </a:r>
+          </a:p>
+        </p:txBody>
+      </p:sp>
+      <p:sp>
+        <p:nvSpPr>
+          <p:cNvPr id="3" name="Rectangle 2"/>
           <p:cNvSpPr/>
           <p:nvPr/>
         </p:nvSpPr>
         <p:spPr>
           <a:xfrm>
-            <a:off x="274320" y="1143000"/>
-            <a:ext cx="3566160" cy="1143000"/>
+            <a:off x="320040" y="1828800"/>
+            <a:ext cx="3474720" cy="93195"/>
           </a:xfrm>
           <a:prstGeom prst="rect">
             <a:avLst/>
@@ -4702,48 +4611,48 @@
           <a:lstStyle/>
           <a:p>
             <a:pPr algn="l">
-              <a:spcAft>
-                <a:spcPts val="400"/>
-              </a:spcAft>
+              <a:lnSpc>
+                <a:spcPct val="130000"/>
+              </a:lnSpc>
             </a:pPr>
             <a:r>
-              <a:rPr sz="2400" b="1">
-                <a:solidFill>
-                  <a:srgbClr val="FFFFFF"/>
+              <a:rPr sz="2800" b="1">
+                <a:solidFill>
+                  <a:srgbClr val="F5F0EB"/>
                 </a:solidFill>
                 <a:latin typeface="Hiragino Sans"/>
               </a:rPr>
-              <a:t>日本企業の</a:t>
+              <a:t>DXが</a:t>
             </a:r>
           </a:p>
           <a:p>
             <a:pPr algn="l">
-              <a:spcAft>
-                <a:spcPts val="400"/>
-              </a:spcAft>
+              <a:lnSpc>
+                <a:spcPct val="130000"/>
+              </a:lnSpc>
             </a:pPr>
             <a:r>
-              <a:rPr sz="2400" b="1">
-                <a:solidFill>
-                  <a:srgbClr val="FFFFFF"/>
+              <a:rPr sz="2800" b="1">
+                <a:solidFill>
+                  <a:srgbClr val="F5F0EB"/>
                 </a:solidFill>
                 <a:latin typeface="Hiragino Sans"/>
               </a:rPr>
-              <a:t>79.3%が</a:t>
-            </a:r>
-          </a:p>
-        </p:txBody>
-      </p:sp>
-      <p:sp>
-        <p:nvSpPr>
-          <p:cNvPr id="5" name="Rectangle 4"/>
+              <a:t>進まない理由、</a:t>
+            </a:r>
+          </a:p>
+        </p:txBody>
+      </p:sp>
+      <p:sp>
+        <p:nvSpPr>
+          <p:cNvPr id="4" name="Rectangle 3"/>
           <p:cNvSpPr/>
           <p:nvPr/>
         </p:nvSpPr>
         <p:spPr>
           <a:xfrm>
-            <a:off x="274320" y="2286000"/>
-            <a:ext cx="3566160" cy="731520"/>
+            <a:off x="320040" y="2971800"/>
+            <a:ext cx="3474720" cy="46597"/>
           </a:xfrm>
           <a:prstGeom prst="rect">
             <a:avLst/>
@@ -4771,20 +4680,63 @@
           <a:bodyPr rtlCol="0" anchor="ctr" wrap="square"/>
           <a:lstStyle/>
           <a:p>
-            <a:pPr algn="ctr">
-              <a:spcAft>
-                <a:spcPts val="400"/>
-              </a:spcAft>
+            <a:pPr algn="l">
+              <a:lnSpc>
+                <a:spcPct val="130000"/>
+              </a:lnSpc>
             </a:pPr>
             <a:r>
               <a:rPr sz="2800" b="1">
                 <a:solidFill>
-                  <a:srgbClr val="E53935"/>
+                  <a:srgbClr val="E84D3D"/>
                 </a:solidFill>
                 <a:latin typeface="Hiragino Sans"/>
               </a:rPr>
-              <a:t>「人材不足」</a:t>
-            </a:r>
+              <a:t>ここにある。</a:t>
+            </a:r>
+          </a:p>
+        </p:txBody>
+      </p:sp>
+      <p:sp>
+        <p:nvSpPr>
+          <p:cNvPr id="5" name="Rectangle 4"/>
+          <p:cNvSpPr/>
+          <p:nvPr/>
+        </p:nvSpPr>
+        <p:spPr>
+          <a:xfrm>
+            <a:off x="320040" y="3657600"/>
+            <a:ext cx="914400" cy="13716"/>
+          </a:xfrm>
+          <a:prstGeom prst="rect">
+            <a:avLst/>
+          </a:prstGeom>
+          <a:solidFill>
+            <a:srgbClr val="C9A02D"/>
+          </a:solidFill>
+          <a:ln>
+            <a:noFill/>
+          </a:ln>
+        </p:spPr>
+        <p:style>
+          <a:lnRef idx="1">
+            <a:schemeClr val="accent1"/>
+          </a:lnRef>
+          <a:fillRef idx="3">
+            <a:schemeClr val="accent1"/>
+          </a:fillRef>
+          <a:effectRef idx="2">
+            <a:schemeClr val="accent1"/>
+          </a:effectRef>
+          <a:fontRef idx="minor">
+            <a:schemeClr val="lt1"/>
+          </a:fontRef>
+        </p:style>
+        <p:txBody>
+          <a:bodyPr rtlCol="0" anchor="ctr"/>
+          <a:lstStyle/>
+          <a:p>
+            <a:pPr algn="ctr"/>
           </a:p>
         </p:txBody>
       </p:sp>
@@ -4796,8 +4748,8 @@
         </p:nvSpPr>
         <p:spPr>
           <a:xfrm>
-            <a:off x="274320" y="2971800"/>
-            <a:ext cx="3566160" cy="548640"/>
+            <a:off x="320040" y="3886200"/>
+            <a:ext cx="3474720" cy="106509"/>
           </a:xfrm>
           <a:prstGeom prst="rect">
             <a:avLst/>
@@ -4825,19 +4777,67 @@
           <a:bodyPr rtlCol="0" anchor="ctr" wrap="square"/>
           <a:lstStyle/>
           <a:p>
-            <a:pPr algn="ctr">
-              <a:spcAft>
-                <a:spcPts val="400"/>
-              </a:spcAft>
+            <a:pPr algn="l">
+              <a:lnSpc>
+                <a:spcPct val="160000"/>
+              </a:lnSpc>
             </a:pPr>
             <a:r>
-              <a:rPr sz="2000" b="1">
-                <a:solidFill>
-                  <a:srgbClr val="FFFFFF"/>
+              <a:rPr sz="1300" b="0">
+                <a:solidFill>
+                  <a:srgbClr val="78716C"/>
                 </a:solidFill>
                 <a:latin typeface="Hiragino Sans"/>
               </a:rPr>
-              <a:t>と答えた</a:t>
+              <a:t>ツールの問題じゃない。</a:t>
+            </a:r>
+          </a:p>
+          <a:p>
+            <a:pPr algn="l">
+              <a:lnSpc>
+                <a:spcPct val="160000"/>
+              </a:lnSpc>
+            </a:pPr>
+            <a:r>
+              <a:rPr sz="1300" b="0">
+                <a:solidFill>
+                  <a:srgbClr val="78716C"/>
+                </a:solidFill>
+                <a:latin typeface="Hiragino Sans"/>
+              </a:rPr>
+              <a:t>「承認プロセス」の問題。</a:t>
+            </a:r>
+          </a:p>
+          <a:p>
+            <a:pPr algn="l">
+              <a:lnSpc>
+                <a:spcPct val="160000"/>
+              </a:lnSpc>
+            </a:pPr>
+            <a:r>
+              <a:rPr sz="1300" b="0">
+                <a:solidFill>
+                  <a:srgbClr val="78716C"/>
+                </a:solidFill>
+                <a:latin typeface="Hiragino Sans"/>
+              </a:rPr>
+              <a:t>「まず上に確認します」の間に、</a:t>
+            </a:r>
+          </a:p>
+          <a:p>
+            <a:pPr algn="l">
+              <a:lnSpc>
+                <a:spcPct val="160000"/>
+              </a:lnSpc>
+            </a:pPr>
+            <a:r>
+              <a:rPr sz="1300" b="0">
+                <a:solidFill>
+                  <a:srgbClr val="78716C"/>
+                </a:solidFill>
+                <a:latin typeface="Hiragino Sans"/>
+              </a:rPr>
+              <a:t>フリーランスはAIで終わらせている。</a:t>
             </a:r>
           </a:p>
         </p:txBody>
@@ -4850,51 +4850,8 @@
         </p:nvSpPr>
         <p:spPr>
           <a:xfrm>
-            <a:off x="274320" y="3657600"/>
-            <a:ext cx="3566160" cy="18288"/>
-          </a:xfrm>
-          <a:prstGeom prst="rect">
-            <a:avLst/>
-          </a:prstGeom>
-          <a:solidFill>
-            <a:srgbClr val="B8942F"/>
-          </a:solidFill>
-          <a:ln>
-            <a:noFill/>
-          </a:ln>
-        </p:spPr>
-        <p:style>
-          <a:lnRef idx="1">
-            <a:schemeClr val="accent1"/>
-          </a:lnRef>
-          <a:fillRef idx="3">
-            <a:schemeClr val="accent1"/>
-          </a:fillRef>
-          <a:effectRef idx="2">
-            <a:schemeClr val="accent1"/>
-          </a:effectRef>
-          <a:fontRef idx="minor">
-            <a:schemeClr val="lt1"/>
-          </a:fontRef>
-        </p:style>
-        <p:txBody>
-          <a:bodyPr rtlCol="0" anchor="ctr"/>
-          <a:lstStyle/>
-          <a:p>
-            <a:pPr algn="ctr"/>
-          </a:p>
-        </p:txBody>
-      </p:sp>
-      <p:sp>
-        <p:nvSpPr>
-          <p:cNvPr id="8" name="Rectangle 7"/>
-          <p:cNvSpPr/>
-          <p:nvPr/>
-        </p:nvSpPr>
-        <p:spPr>
-          <a:xfrm>
-            <a:off x="274320" y="3886200"/>
-            <a:ext cx="3566160" cy="1371600"/>
+            <a:off x="320040" y="6720000"/>
+            <a:ext cx="3474720" cy="14977"/>
           </a:xfrm>
           <a:prstGeom prst="rect">
             <a:avLst/>
@@ -4923,50 +4880,18 @@
           <a:lstStyle/>
           <a:p>
             <a:pPr algn="l">
-              <a:spcAft>
-                <a:spcPts val="400"/>
-              </a:spcAft>
+              <a:lnSpc>
+                <a:spcPct val="130000"/>
+              </a:lnSpc>
             </a:pPr>
             <a:r>
-              <a:rPr sz="1800" b="1">
-                <a:solidFill>
-                  <a:srgbClr val="B8942F"/>
+              <a:rPr sz="900" b="0">
+                <a:solidFill>
+                  <a:srgbClr val="C9A02D"/>
                 </a:solidFill>
                 <a:latin typeface="Hiragino Sans"/>
               </a:rPr>
-              <a:t>本当の問題は</a:t>
-            </a:r>
-          </a:p>
-          <a:p>
-            <a:pPr algn="l">
-              <a:spcAft>
-                <a:spcPts val="400"/>
-              </a:spcAft>
-            </a:pPr>
-            <a:r>
-              <a:rPr sz="1800" b="1">
-                <a:solidFill>
-                  <a:srgbClr val="B8942F"/>
-                </a:solidFill>
-                <a:latin typeface="Hiragino Sans"/>
-              </a:rPr>
-              <a:t>人材がいないことじゃなく</a:t>
-            </a:r>
-          </a:p>
-          <a:p>
-            <a:pPr algn="l">
-              <a:spcAft>
-                <a:spcPts val="400"/>
-              </a:spcAft>
-            </a:pPr>
-            <a:r>
-              <a:rPr sz="1800" b="1">
-                <a:solidFill>
-                  <a:srgbClr val="B8942F"/>
-                </a:solidFill>
-                <a:latin typeface="Hiragino Sans"/>
-              </a:rPr>
-              <a:t>裁量を渡していないこと</a:t>
+              <a:t>HARMONIC insight</a:t>
             </a:r>
           </a:p>
         </p:txBody>
@@ -4985,7 +4910,7 @@
     <p:bg>
       <p:bgPr>
         <a:solidFill>
-          <a:srgbClr val="1C1917"/>
+          <a:srgbClr val="12100E"/>
         </a:solidFill>
         <a:effectLst/>
       </p:bgPr>
@@ -5005,51 +4930,8 @@
         </p:nvSpPr>
         <p:spPr>
           <a:xfrm>
-            <a:off x="0" y="0"/>
-            <a:ext cx="4114800" cy="54864"/>
-          </a:xfrm>
-          <a:prstGeom prst="rect">
-            <a:avLst/>
-          </a:prstGeom>
-          <a:solidFill>
-            <a:srgbClr val="B8942F"/>
-          </a:solidFill>
-          <a:ln>
-            <a:noFill/>
-          </a:ln>
-        </p:spPr>
-        <p:style>
-          <a:lnRef idx="1">
-            <a:schemeClr val="accent1"/>
-          </a:lnRef>
-          <a:fillRef idx="3">
-            <a:schemeClr val="accent1"/>
-          </a:fillRef>
-          <a:effectRef idx="2">
-            <a:schemeClr val="accent1"/>
-          </a:effectRef>
-          <a:fontRef idx="minor">
-            <a:schemeClr val="lt1"/>
-          </a:fontRef>
-        </p:style>
-        <p:txBody>
-          <a:bodyPr rtlCol="0" anchor="ctr"/>
-          <a:lstStyle/>
-          <a:p>
-            <a:pPr algn="ctr"/>
-          </a:p>
-        </p:txBody>
-      </p:sp>
-      <p:sp>
-        <p:nvSpPr>
-          <p:cNvPr id="3" name="Rectangle 2"/>
-          <p:cNvSpPr/>
-          <p:nvPr/>
-        </p:nvSpPr>
-        <p:spPr>
-          <a:xfrm>
-            <a:off x="274320" y="6675120"/>
-            <a:ext cx="3566160" cy="365760"/>
+            <a:off x="320040" y="1600200"/>
+            <a:ext cx="3474720" cy="149778"/>
           </a:xfrm>
           <a:prstGeom prst="rect">
             <a:avLst/>
@@ -5077,29 +4959,65 @@
           <a:bodyPr rtlCol="0" anchor="ctr" wrap="square"/>
           <a:lstStyle/>
           <a:p>
-            <a:pPr algn="l"/>
-            <a:r>
-              <a:rPr sz="900">
-                <a:solidFill>
-                  <a:srgbClr val="B8942F"/>
+            <a:pPr algn="l">
+              <a:lnSpc>
+                <a:spcPct val="130000"/>
+              </a:lnSpc>
+            </a:pPr>
+            <a:r>
+              <a:rPr sz="3000" b="1">
+                <a:solidFill>
+                  <a:srgbClr val="F5F0EB"/>
                 </a:solidFill>
                 <a:latin typeface="Hiragino Sans"/>
               </a:rPr>
-              <a:t>HARMONIC insight</a:t>
-            </a:r>
-          </a:p>
-        </p:txBody>
-      </p:sp>
-      <p:sp>
-        <p:nvSpPr>
-          <p:cNvPr id="4" name="Rectangle 3"/>
+              <a:t>AIの恩恵は</a:t>
+            </a:r>
+          </a:p>
+          <a:p>
+            <a:pPr algn="l">
+              <a:lnSpc>
+                <a:spcPct val="130000"/>
+              </a:lnSpc>
+            </a:pPr>
+            <a:r>
+              <a:rPr sz="3000" b="1">
+                <a:solidFill>
+                  <a:srgbClr val="F5F0EB"/>
+                </a:solidFill>
+                <a:latin typeface="Hiragino Sans"/>
+              </a:rPr>
+              <a:t>能力で</a:t>
+            </a:r>
+          </a:p>
+          <a:p>
+            <a:pPr algn="l">
+              <a:lnSpc>
+                <a:spcPct val="130000"/>
+              </a:lnSpc>
+            </a:pPr>
+            <a:r>
+              <a:rPr sz="3000" b="1">
+                <a:solidFill>
+                  <a:srgbClr val="F5F0EB"/>
+                </a:solidFill>
+                <a:latin typeface="Hiragino Sans"/>
+              </a:rPr>
+              <a:t>決まらない。</a:t>
+            </a:r>
+          </a:p>
+        </p:txBody>
+      </p:sp>
+      <p:sp>
+        <p:nvSpPr>
+          <p:cNvPr id="3" name="Rectangle 2"/>
           <p:cNvSpPr/>
           <p:nvPr/>
         </p:nvSpPr>
         <p:spPr>
           <a:xfrm>
-            <a:off x="274320" y="2057400"/>
-            <a:ext cx="3566160" cy="2286000"/>
+            <a:off x="320040" y="3429000"/>
+            <a:ext cx="3474720" cy="106509"/>
           </a:xfrm>
           <a:prstGeom prst="rect">
             <a:avLst/>
@@ -5128,80 +5046,48 @@
           <a:lstStyle/>
           <a:p>
             <a:pPr algn="l">
-              <a:spcAft>
-                <a:spcPts val="400"/>
-              </a:spcAft>
+              <a:lnSpc>
+                <a:spcPct val="130000"/>
+              </a:lnSpc>
             </a:pPr>
             <a:r>
-              <a:rPr sz="2800" b="1">
-                <a:solidFill>
-                  <a:srgbClr val="FFFFFF"/>
+              <a:rPr sz="3200" b="1">
+                <a:solidFill>
+                  <a:srgbClr val="C9A02D"/>
                 </a:solidFill>
                 <a:latin typeface="Hiragino Sans"/>
               </a:rPr>
-              <a:t>自律性を</a:t>
+              <a:t>自律性で</a:t>
             </a:r>
           </a:p>
           <a:p>
             <a:pPr algn="l">
-              <a:spcAft>
-                <a:spcPts val="400"/>
-              </a:spcAft>
+              <a:lnSpc>
+                <a:spcPct val="130000"/>
+              </a:lnSpc>
             </a:pPr>
             <a:r>
-              <a:rPr sz="2800" b="1">
-                <a:solidFill>
-                  <a:srgbClr val="FFFFFF"/>
+              <a:rPr sz="3200" b="1">
+                <a:solidFill>
+                  <a:srgbClr val="C9A02D"/>
                 </a:solidFill>
                 <a:latin typeface="Hiragino Sans"/>
               </a:rPr>
-              <a:t>渡さない組織は、</a:t>
-            </a:r>
-          </a:p>
-          <a:p>
-            <a:pPr algn="l">
-              <a:spcAft>
-                <a:spcPts val="400"/>
-              </a:spcAft>
-            </a:pPr>
-            <a:r>
-              <a:rPr sz="2800" b="1">
-                <a:solidFill>
-                  <a:srgbClr val="FFFFFF"/>
-                </a:solidFill>
-                <a:latin typeface="Hiragino Sans"/>
-              </a:rPr>
-              <a:t>AIの恩恵を</a:t>
-            </a:r>
-          </a:p>
-          <a:p>
-            <a:pPr algn="l">
-              <a:spcAft>
-                <a:spcPts val="400"/>
-              </a:spcAft>
-            </a:pPr>
-            <a:r>
-              <a:rPr sz="2800" b="1">
-                <a:solidFill>
-                  <a:srgbClr val="FFFFFF"/>
-                </a:solidFill>
-                <a:latin typeface="Hiragino Sans"/>
-              </a:rPr>
-              <a:t>受けられない。</a:t>
-            </a:r>
-          </a:p>
-        </p:txBody>
-      </p:sp>
-      <p:sp>
-        <p:nvSpPr>
-          <p:cNvPr id="5" name="Rectangle 4"/>
+              <a:t>決まる。</a:t>
+            </a:r>
+          </a:p>
+        </p:txBody>
+      </p:sp>
+      <p:sp>
+        <p:nvSpPr>
+          <p:cNvPr id="4" name="Rectangle 3"/>
           <p:cNvSpPr/>
           <p:nvPr/>
         </p:nvSpPr>
         <p:spPr>
           <a:xfrm>
-            <a:off x="274320" y="5486400"/>
-            <a:ext cx="3566160" cy="457200"/>
+            <a:off x="320040" y="6172200"/>
+            <a:ext cx="3474720" cy="13313"/>
           </a:xfrm>
           <a:prstGeom prst="rect">
             <a:avLst/>
@@ -5230,18 +5116,72 @@
           <a:lstStyle/>
           <a:p>
             <a:pPr algn="l">
-              <a:spcAft>
-                <a:spcPts val="400"/>
-              </a:spcAft>
+              <a:lnSpc>
+                <a:spcPct val="130000"/>
+              </a:lnSpc>
             </a:pPr>
             <a:r>
-              <a:rPr sz="900" b="0">
-                <a:solidFill>
-                  <a:srgbClr val="57534E"/>
+              <a:rPr sz="800" b="0">
+                <a:solidFill>
+                  <a:srgbClr val="4A4540"/>
                 </a:solidFill>
                 <a:latin typeface="Hiragino Sans"/>
               </a:rPr>
-              <a:t>出典: Anthropic "81,000 Interviews" 2026</a:t>
+              <a:t>Anthropic "81,000 Interviews" 2026年3月18日</a:t>
+            </a:r>
+          </a:p>
+        </p:txBody>
+      </p:sp>
+      <p:sp>
+        <p:nvSpPr>
+          <p:cNvPr id="5" name="Rectangle 4"/>
+          <p:cNvSpPr/>
+          <p:nvPr/>
+        </p:nvSpPr>
+        <p:spPr>
+          <a:xfrm>
+            <a:off x="320040" y="6720000"/>
+            <a:ext cx="3474720" cy="14977"/>
+          </a:xfrm>
+          <a:prstGeom prst="rect">
+            <a:avLst/>
+          </a:prstGeom>
+          <a:noFill/>
+          <a:ln>
+            <a:noFill/>
+          </a:ln>
+        </p:spPr>
+        <p:style>
+          <a:lnRef idx="1">
+            <a:schemeClr val="accent1"/>
+          </a:lnRef>
+          <a:fillRef idx="3">
+            <a:schemeClr val="accent1"/>
+          </a:fillRef>
+          <a:effectRef idx="2">
+            <a:schemeClr val="accent1"/>
+          </a:effectRef>
+          <a:fontRef idx="minor">
+            <a:schemeClr val="lt1"/>
+          </a:fontRef>
+        </p:style>
+        <p:txBody>
+          <a:bodyPr rtlCol="0" anchor="ctr" wrap="square"/>
+          <a:lstStyle/>
+          <a:p>
+            <a:pPr algn="l">
+              <a:lnSpc>
+                <a:spcPct val="130000"/>
+              </a:lnSpc>
+            </a:pPr>
+            <a:r>
+              <a:rPr sz="900" b="0">
+                <a:solidFill>
+                  <a:srgbClr val="C9A02D"/>
+                </a:solidFill>
+                <a:latin typeface="Hiragino Sans"/>
+              </a:rPr>
+              <a:t>HARMONIC insight</a:t>
             </a:r>
           </a:p>
         </p:txBody>

--- a/content/youtube/shorts/SHORT_NEWS_02_anthropic_autonomy.pptx
+++ b/content/youtube/shorts/SHORT_NEWS_02_anthropic_autonomy.pptx
@@ -3088,7 +3088,7 @@
     <p:bg>
       <p:bgPr>
         <a:solidFill>
-          <a:srgbClr val="12100E"/>
+          <a:srgbClr val="FAF8F5"/>
         </a:solidFill>
         <a:effectLst/>
       </p:bgPr>
@@ -3108,8 +3108,8 @@
         </p:nvSpPr>
         <p:spPr>
           <a:xfrm>
-            <a:off x="320040" y="457200"/>
-            <a:ext cx="1645920" cy="274320"/>
+            <a:off x="365760" y="548640"/>
+            <a:ext cx="1737360" cy="274320"/>
           </a:xfrm>
           <a:prstGeom prst="roundRect">
             <a:avLst>
@@ -3117,7 +3117,7 @@
             </a:avLst>
           </a:prstGeom>
           <a:solidFill>
-            <a:srgbClr val="E84D3D"/>
+            <a:srgbClr val="B5453A"/>
           </a:solidFill>
           <a:ln>
             <a:noFill/>
@@ -3138,14 +3138,14 @@
           </a:fontRef>
         </p:style>
         <p:txBody>
-          <a:bodyPr rtlCol="0" anchor="ctr" wrap="none"/>
+          <a:bodyPr rtlCol="0" anchor="ctr"/>
           <a:lstStyle/>
           <a:p>
             <a:pPr algn="ctr"/>
             <a:r>
-              <a:rPr sz="1100" b="1">
-                <a:solidFill>
-                  <a:srgbClr val="F5F0EB"/>
+              <a:rPr sz="1000" b="1">
+                <a:solidFill>
+                  <a:srgbClr val="FFFFFF"/>
                 </a:solidFill>
                 <a:latin typeface="Hiragino Sans"/>
               </a:rPr>
@@ -3162,8 +3162,8 @@
         </p:nvSpPr>
         <p:spPr>
           <a:xfrm>
-            <a:off x="320040" y="1371600"/>
-            <a:ext cx="3474720" cy="46597"/>
+            <a:off x="365760" y="1371600"/>
+            <a:ext cx="3383280" cy="46360"/>
           </a:xfrm>
           <a:prstGeom prst="rect">
             <a:avLst/>
@@ -3197,9 +3197,9 @@
               </a:lnSpc>
             </a:pPr>
             <a:r>
-              <a:rPr sz="2800" b="1">
-                <a:solidFill>
-                  <a:srgbClr val="F5F0EB"/>
+              <a:rPr sz="2600" b="1">
+                <a:solidFill>
+                  <a:srgbClr val="1C1917"/>
                 </a:solidFill>
                 <a:latin typeface="Hiragino Sans"/>
               </a:rPr>
@@ -3216,8 +3216,8 @@
         </p:nvSpPr>
         <p:spPr>
           <a:xfrm>
-            <a:off x="320040" y="2057400"/>
-            <a:ext cx="3474720" cy="149778"/>
+            <a:off x="365760" y="2057400"/>
+            <a:ext cx="3383280" cy="160477"/>
           </a:xfrm>
           <a:prstGeom prst="rect">
             <a:avLst/>
@@ -3253,7 +3253,7 @@
             <a:r>
               <a:rPr sz="3000" b="1">
                 <a:solidFill>
-                  <a:srgbClr val="E84D3D"/>
+                  <a:srgbClr val="B5453A"/>
                 </a:solidFill>
                 <a:latin typeface="Hiragino Sans"/>
               </a:rPr>
@@ -3269,7 +3269,7 @@
             <a:r>
               <a:rPr sz="3000" b="1">
                 <a:solidFill>
-                  <a:srgbClr val="E84D3D"/>
+                  <a:srgbClr val="B5453A"/>
                 </a:solidFill>
                 <a:latin typeface="Hiragino Sans"/>
               </a:rPr>
@@ -3285,7 +3285,7 @@
             <a:r>
               <a:rPr sz="3000" b="1">
                 <a:solidFill>
-                  <a:srgbClr val="E84D3D"/>
+                  <a:srgbClr val="B5453A"/>
                 </a:solidFill>
                 <a:latin typeface="Hiragino Sans"/>
               </a:rPr>
@@ -3302,14 +3302,14 @@
         </p:nvSpPr>
         <p:spPr>
           <a:xfrm>
-            <a:off x="320040" y="3886200"/>
+            <a:off x="365760" y="4114800"/>
             <a:ext cx="914400" cy="13716"/>
           </a:xfrm>
           <a:prstGeom prst="rect">
             <a:avLst/>
           </a:prstGeom>
           <a:solidFill>
-            <a:srgbClr val="C9A02D"/>
+            <a:srgbClr val="B8942F"/>
           </a:solidFill>
           <a:ln>
             <a:noFill/>
@@ -3345,8 +3345,8 @@
         </p:nvSpPr>
         <p:spPr>
           <a:xfrm>
-            <a:off x="320040" y="4114800"/>
-            <a:ext cx="3474720" cy="39940"/>
+            <a:off x="365760" y="4343400"/>
+            <a:ext cx="3383280" cy="39227"/>
           </a:xfrm>
           <a:prstGeom prst="rect">
             <a:avLst/>
@@ -3380,9 +3380,9 @@
               </a:lnSpc>
             </a:pPr>
             <a:r>
-              <a:rPr sz="1200" b="0">
-                <a:solidFill>
-                  <a:srgbClr val="78716C"/>
+              <a:rPr sz="1100" b="0">
+                <a:solidFill>
+                  <a:srgbClr val="7A6652"/>
                 </a:solidFill>
                 <a:latin typeface="Hiragino Sans"/>
               </a:rPr>
@@ -3396,9 +3396,9 @@
               </a:lnSpc>
             </a:pPr>
             <a:r>
-              <a:rPr sz="1200" b="0">
-                <a:solidFill>
-                  <a:srgbClr val="78716C"/>
+              <a:rPr sz="1100" b="0">
+                <a:solidFill>
+                  <a:srgbClr val="7A6652"/>
                 </a:solidFill>
                 <a:latin typeface="Hiragino Sans"/>
               </a:rPr>
@@ -3415,8 +3415,8 @@
         </p:nvSpPr>
         <p:spPr>
           <a:xfrm>
-            <a:off x="320040" y="6720000"/>
-            <a:ext cx="3474720" cy="14977"/>
+            <a:off x="365760" y="6720000"/>
+            <a:ext cx="3383280" cy="16047"/>
           </a:xfrm>
           <a:prstGeom prst="rect">
             <a:avLst/>
@@ -3452,7 +3452,7 @@
             <a:r>
               <a:rPr sz="900" b="0">
                 <a:solidFill>
-                  <a:srgbClr val="C9A02D"/>
+                  <a:srgbClr val="B8942F"/>
                 </a:solidFill>
                 <a:latin typeface="Hiragino Sans"/>
               </a:rPr>
@@ -3475,7 +3475,7 @@
     <p:bg>
       <p:bgPr>
         <a:solidFill>
-          <a:srgbClr val="12100E"/>
+          <a:srgbClr val="FAF8F5"/>
         </a:solidFill>
         <a:effectLst/>
       </p:bgPr>
@@ -3495,8 +3495,8 @@
         </p:nvSpPr>
         <p:spPr>
           <a:xfrm>
-            <a:off x="320040" y="548640"/>
-            <a:ext cx="3474720" cy="23298"/>
+            <a:off x="365760" y="457200"/>
+            <a:ext cx="3383280" cy="24963"/>
           </a:xfrm>
           <a:prstGeom prst="rect">
             <a:avLst/>
@@ -3532,7 +3532,7 @@
             <a:r>
               <a:rPr sz="1400" b="0">
                 <a:solidFill>
-                  <a:srgbClr val="78716C"/>
+                  <a:srgbClr val="7A6652"/>
                 </a:solidFill>
                 <a:latin typeface="Hiragino Sans"/>
               </a:rPr>
@@ -3549,8 +3549,8 @@
         </p:nvSpPr>
         <p:spPr>
           <a:xfrm>
-            <a:off x="320040" y="914400"/>
-            <a:ext cx="3474720" cy="66568"/>
+            <a:off x="365760" y="822960"/>
+            <a:ext cx="3383280" cy="64190"/>
           </a:xfrm>
           <a:prstGeom prst="rect">
             <a:avLst/>
@@ -3584,9 +3584,9 @@
               </a:lnSpc>
             </a:pPr>
             <a:r>
-              <a:rPr sz="2000" b="1">
-                <a:solidFill>
-                  <a:srgbClr val="F5F0EB"/>
+              <a:rPr sz="1800" b="1">
+                <a:solidFill>
+                  <a:srgbClr val="1C1917"/>
                 </a:solidFill>
                 <a:latin typeface="Hiragino Sans"/>
               </a:rPr>
@@ -3600,9 +3600,9 @@
               </a:lnSpc>
             </a:pPr>
             <a:r>
-              <a:rPr sz="2000" b="1">
-                <a:solidFill>
-                  <a:srgbClr val="F5F0EB"/>
+              <a:rPr sz="1800" b="1">
+                <a:solidFill>
+                  <a:srgbClr val="1C1917"/>
                 </a:solidFill>
                 <a:latin typeface="Hiragino Sans"/>
               </a:rPr>
@@ -3619,14 +3619,14 @@
         </p:nvSpPr>
         <p:spPr>
           <a:xfrm>
-            <a:off x="320040" y="1600200"/>
+            <a:off x="365760" y="1371600"/>
             <a:ext cx="914400" cy="13716"/>
           </a:xfrm>
           <a:prstGeom prst="rect">
             <a:avLst/>
           </a:prstGeom>
           <a:solidFill>
-            <a:srgbClr val="C9A02D"/>
+            <a:srgbClr val="B8942F"/>
           </a:solidFill>
           <a:ln>
             <a:noFill/>
@@ -3656,14 +3656,66 @@
       </p:sp>
       <p:sp>
         <p:nvSpPr>
-          <p:cNvPr id="5" name="Rectangle 4"/>
+          <p:cNvPr id="5" name="Rounded Rectangle 4"/>
           <p:cNvSpPr/>
           <p:nvPr/>
         </p:nvSpPr>
         <p:spPr>
           <a:xfrm>
-            <a:off x="320040" y="1828800"/>
-            <a:ext cx="3474720" cy="76809"/>
+            <a:off x="365760" y="1600200"/>
+            <a:ext cx="3383280" cy="1143000"/>
+          </a:xfrm>
+          <a:prstGeom prst="roundRect">
+            <a:avLst>
+              <a:gd name="adj" fmla="val 3000"/>
+            </a:avLst>
+          </a:prstGeom>
+          <a:solidFill>
+            <a:srgbClr val="FFFFFF"/>
+          </a:solidFill>
+          <a:ln>
+            <a:noFill/>
+          </a:ln>
+          <a:effectLst>
+            <a:outerShdw blurRad="76200" dist="25400" dir="5400000" rotWithShape="0">
+              <a:srgbClr val="1C1917">
+                <a:alpha val="12000"/>
+              </a:srgbClr>
+            </a:outerShdw>
+          </a:effectLst>
+        </p:spPr>
+        <p:style>
+          <a:lnRef idx="1">
+            <a:schemeClr val="accent1"/>
+          </a:lnRef>
+          <a:fillRef idx="3">
+            <a:schemeClr val="accent1"/>
+          </a:fillRef>
+          <a:effectRef idx="2">
+            <a:schemeClr val="accent1"/>
+          </a:effectRef>
+          <a:fontRef idx="minor">
+            <a:schemeClr val="lt1"/>
+          </a:fontRef>
+        </p:style>
+        <p:txBody>
+          <a:bodyPr rtlCol="0" anchor="ctr"/>
+          <a:lstStyle/>
+          <a:p>
+            <a:pPr algn="ctr"/>
+          </a:p>
+        </p:txBody>
+      </p:sp>
+      <p:sp>
+        <p:nvSpPr>
+          <p:cNvPr id="6" name="Rectangle 5"/>
+          <p:cNvSpPr/>
+          <p:nvPr/>
+        </p:nvSpPr>
+        <p:spPr>
+          <a:xfrm>
+            <a:off x="365760" y="1737360"/>
+            <a:ext cx="3383280" cy="79004"/>
           </a:xfrm>
           <a:prstGeom prst="rect">
             <a:avLst/>
@@ -3688,23 +3740,23 @@
           </a:fontRef>
         </p:style>
         <p:txBody>
-          <a:bodyPr rtlCol="0" anchor="ctr" wrap="none"/>
+          <a:bodyPr rtlCol="0" anchor="ctr"/>
           <a:lstStyle/>
           <a:p>
             <a:pPr algn="l"/>
             <a:r>
-              <a:rPr sz="5600" b="1">
-                <a:solidFill>
-                  <a:srgbClr val="6BD47B"/>
+              <a:rPr sz="5400" b="1">
+                <a:solidFill>
+                  <a:srgbClr val="2A7A6E"/>
                 </a:solidFill>
                 <a:latin typeface="Hiragino Sans"/>
               </a:rPr>
               <a:t>47</a:t>
             </a:r>
             <a:r>
-              <a:rPr sz="2800" b="1">
-                <a:solidFill>
-                  <a:srgbClr val="6BD47B"/>
+              <a:rPr sz="2600" b="1">
+                <a:solidFill>
+                  <a:srgbClr val="2A7A6E"/>
                 </a:solidFill>
                 <a:latin typeface="Hiragino Sans"/>
               </a:rPr>
@@ -3715,14 +3767,14 @@
       </p:sp>
       <p:sp>
         <p:nvSpPr>
-          <p:cNvPr id="6" name="Rectangle 5"/>
+          <p:cNvPr id="7" name="Rectangle 6"/>
           <p:cNvSpPr/>
           <p:nvPr/>
         </p:nvSpPr>
         <p:spPr>
           <a:xfrm>
-            <a:off x="320040" y="2743200"/>
-            <a:ext cx="3474720" cy="21634"/>
+            <a:off x="365760" y="2286000"/>
+            <a:ext cx="3383280" cy="21396"/>
           </a:xfrm>
           <a:prstGeom prst="rect">
             <a:avLst/>
@@ -3756,9 +3808,9 @@
               </a:lnSpc>
             </a:pPr>
             <a:r>
-              <a:rPr sz="1300" b="0">
-                <a:solidFill>
-                  <a:srgbClr val="78716C"/>
+              <a:rPr sz="1200" b="0">
+                <a:solidFill>
+                  <a:srgbClr val="7A6652"/>
                 </a:solidFill>
                 <a:latin typeface="Hiragino Sans"/>
               </a:rPr>
@@ -3769,14 +3821,66 @@
       </p:sp>
       <p:sp>
         <p:nvSpPr>
-          <p:cNvPr id="7" name="Rectangle 6"/>
+          <p:cNvPr id="8" name="Rounded Rectangle 7"/>
           <p:cNvSpPr/>
           <p:nvPr/>
         </p:nvSpPr>
         <p:spPr>
           <a:xfrm>
-            <a:off x="320040" y="3200400"/>
-            <a:ext cx="3474720" cy="76809"/>
+            <a:off x="365760" y="2971800"/>
+            <a:ext cx="3383280" cy="1143000"/>
+          </a:xfrm>
+          <a:prstGeom prst="roundRect">
+            <a:avLst>
+              <a:gd name="adj" fmla="val 3000"/>
+            </a:avLst>
+          </a:prstGeom>
+          <a:solidFill>
+            <a:srgbClr val="FFFFFF"/>
+          </a:solidFill>
+          <a:ln>
+            <a:noFill/>
+          </a:ln>
+          <a:effectLst>
+            <a:outerShdw blurRad="76200" dist="25400" dir="5400000" rotWithShape="0">
+              <a:srgbClr val="1C1917">
+                <a:alpha val="12000"/>
+              </a:srgbClr>
+            </a:outerShdw>
+          </a:effectLst>
+        </p:spPr>
+        <p:style>
+          <a:lnRef idx="1">
+            <a:schemeClr val="accent1"/>
+          </a:lnRef>
+          <a:fillRef idx="3">
+            <a:schemeClr val="accent1"/>
+          </a:fillRef>
+          <a:effectRef idx="2">
+            <a:schemeClr val="accent1"/>
+          </a:effectRef>
+          <a:fontRef idx="minor">
+            <a:schemeClr val="lt1"/>
+          </a:fontRef>
+        </p:style>
+        <p:txBody>
+          <a:bodyPr rtlCol="0" anchor="ctr"/>
+          <a:lstStyle/>
+          <a:p>
+            <a:pPr algn="ctr"/>
+          </a:p>
+        </p:txBody>
+      </p:sp>
+      <p:sp>
+        <p:nvSpPr>
+          <p:cNvPr id="9" name="Rectangle 8"/>
+          <p:cNvSpPr/>
+          <p:nvPr/>
+        </p:nvSpPr>
+        <p:spPr>
+          <a:xfrm>
+            <a:off x="365760" y="3109000"/>
+            <a:ext cx="3383280" cy="79004"/>
           </a:xfrm>
           <a:prstGeom prst="rect">
             <a:avLst/>
@@ -3801,23 +3905,23 @@
           </a:fontRef>
         </p:style>
         <p:txBody>
-          <a:bodyPr rtlCol="0" anchor="ctr" wrap="none"/>
+          <a:bodyPr rtlCol="0" anchor="ctr"/>
           <a:lstStyle/>
           <a:p>
             <a:pPr algn="l"/>
             <a:r>
-              <a:rPr sz="5600" b="1">
-                <a:solidFill>
-                  <a:srgbClr val="E84D3D"/>
+              <a:rPr sz="5400" b="1">
+                <a:solidFill>
+                  <a:srgbClr val="B5453A"/>
                 </a:solidFill>
                 <a:latin typeface="Hiragino Sans"/>
               </a:rPr>
               <a:t>14</a:t>
             </a:r>
             <a:r>
-              <a:rPr sz="2800" b="1">
-                <a:solidFill>
-                  <a:srgbClr val="E84D3D"/>
+              <a:rPr sz="2600" b="1">
+                <a:solidFill>
+                  <a:srgbClr val="B5453A"/>
                 </a:solidFill>
                 <a:latin typeface="Hiragino Sans"/>
               </a:rPr>
@@ -3828,14 +3932,14 @@
       </p:sp>
       <p:sp>
         <p:nvSpPr>
-          <p:cNvPr id="8" name="Rectangle 7"/>
+          <p:cNvPr id="10" name="Rectangle 9"/>
           <p:cNvSpPr/>
           <p:nvPr/>
         </p:nvSpPr>
         <p:spPr>
           <a:xfrm>
-            <a:off x="320040" y="4114800"/>
-            <a:ext cx="3474720" cy="21634"/>
+            <a:off x="365760" y="3657600"/>
+            <a:ext cx="3383280" cy="21396"/>
           </a:xfrm>
           <a:prstGeom prst="rect">
             <a:avLst/>
@@ -3869,9 +3973,9 @@
               </a:lnSpc>
             </a:pPr>
             <a:r>
-              <a:rPr sz="1300" b="0">
-                <a:solidFill>
-                  <a:srgbClr val="78716C"/>
+              <a:rPr sz="1200" b="0">
+                <a:solidFill>
+                  <a:srgbClr val="7A6652"/>
                 </a:solidFill>
                 <a:latin typeface="Hiragino Sans"/>
               </a:rPr>
@@ -3882,14 +3986,14 @@
       </p:sp>
       <p:sp>
         <p:nvSpPr>
-          <p:cNvPr id="9" name="Rectangle 8"/>
+          <p:cNvPr id="11" name="Rectangle 10"/>
           <p:cNvSpPr/>
           <p:nvPr/>
         </p:nvSpPr>
         <p:spPr>
           <a:xfrm>
-            <a:off x="320040" y="4571040"/>
-            <a:ext cx="3474720" cy="36612"/>
+            <a:off x="365760" y="4343400"/>
+            <a:ext cx="3383280" cy="39227"/>
           </a:xfrm>
           <a:prstGeom prst="rect">
             <a:avLst/>
@@ -3925,7 +4029,7 @@
             <a:r>
               <a:rPr sz="2200" b="1">
                 <a:solidFill>
-                  <a:srgbClr val="C9A02D"/>
+                  <a:srgbClr val="B8942F"/>
                 </a:solidFill>
                 <a:latin typeface="Hiragino Sans"/>
               </a:rPr>
@@ -3936,14 +4040,14 @@
       </p:sp>
       <p:sp>
         <p:nvSpPr>
-          <p:cNvPr id="10" name="Rectangle 9"/>
+          <p:cNvPr id="12" name="Rectangle 11"/>
           <p:cNvSpPr/>
           <p:nvPr/>
         </p:nvSpPr>
         <p:spPr>
           <a:xfrm>
-            <a:off x="320040" y="6400000"/>
-            <a:ext cx="3474720" cy="13313"/>
+            <a:off x="365760" y="6400000"/>
+            <a:ext cx="3383280" cy="12481"/>
           </a:xfrm>
           <a:prstGeom prst="rect">
             <a:avLst/>
@@ -3977,9 +4081,9 @@
               </a:lnSpc>
             </a:pPr>
             <a:r>
-              <a:rPr sz="800" b="0">
-                <a:solidFill>
-                  <a:srgbClr val="4A4540"/>
+              <a:rPr sz="700" b="0">
+                <a:solidFill>
+                  <a:srgbClr val="BFAD9C"/>
                 </a:solidFill>
                 <a:latin typeface="Hiragino Sans"/>
               </a:rPr>
@@ -3990,14 +4094,14 @@
       </p:sp>
       <p:sp>
         <p:nvSpPr>
-          <p:cNvPr id="11" name="Rectangle 10"/>
+          <p:cNvPr id="13" name="Rectangle 12"/>
           <p:cNvSpPr/>
           <p:nvPr/>
         </p:nvSpPr>
         <p:spPr>
           <a:xfrm>
-            <a:off x="320040" y="6720000"/>
-            <a:ext cx="3474720" cy="14977"/>
+            <a:off x="365760" y="6720000"/>
+            <a:ext cx="3383280" cy="16047"/>
           </a:xfrm>
           <a:prstGeom prst="rect">
             <a:avLst/>
@@ -4033,7 +4137,7 @@
             <a:r>
               <a:rPr sz="900" b="0">
                 <a:solidFill>
-                  <a:srgbClr val="C9A02D"/>
+                  <a:srgbClr val="B8942F"/>
                 </a:solidFill>
                 <a:latin typeface="Hiragino Sans"/>
               </a:rPr>
@@ -4056,7 +4160,7 @@
     <p:bg>
       <p:bgPr>
         <a:solidFill>
-          <a:srgbClr val="12100E"/>
+          <a:srgbClr val="FAF8F5"/>
         </a:solidFill>
         <a:effectLst/>
       </p:bgPr>
@@ -4076,14 +4180,14 @@
         </p:nvSpPr>
         <p:spPr>
           <a:xfrm>
-            <a:off x="0" y="1143000"/>
-            <a:ext cx="36576" cy="3200400"/>
+            <a:off x="0" y="914400"/>
+            <a:ext cx="32000" cy="3886200"/>
           </a:xfrm>
           <a:prstGeom prst="rect">
             <a:avLst/>
           </a:prstGeom>
           <a:solidFill>
-            <a:srgbClr val="C9A02D"/>
+            <a:srgbClr val="B8942F"/>
           </a:solidFill>
           <a:ln>
             <a:noFill/>
@@ -4119,8 +4223,8 @@
         </p:nvSpPr>
         <p:spPr>
           <a:xfrm>
-            <a:off x="320040" y="1143000"/>
-            <a:ext cx="3474720" cy="53254"/>
+            <a:off x="365760" y="1143000"/>
+            <a:ext cx="3383280" cy="49926"/>
           </a:xfrm>
           <a:prstGeom prst="rect">
             <a:avLst/>
@@ -4154,9 +4258,9 @@
               </a:lnSpc>
             </a:pPr>
             <a:r>
-              <a:rPr sz="1600" b="0">
-                <a:solidFill>
-                  <a:srgbClr val="78716C"/>
+              <a:rPr sz="1400" b="0">
+                <a:solidFill>
+                  <a:srgbClr val="7A6652"/>
                 </a:solidFill>
                 <a:latin typeface="Hiragino Sans"/>
               </a:rPr>
@@ -4170,13 +4274,13 @@
               </a:lnSpc>
             </a:pPr>
             <a:r>
-              <a:rPr sz="1600" b="0">
-                <a:solidFill>
-                  <a:srgbClr val="78716C"/>
+              <a:rPr sz="1400" b="0">
+                <a:solidFill>
+                  <a:srgbClr val="7A6652"/>
                 </a:solidFill>
                 <a:latin typeface="Hiragino Sans"/>
               </a:rPr>
-              <a:t>面白い数字を出した</a:t>
+              <a:t>面白い数字を出している</a:t>
             </a:r>
           </a:p>
         </p:txBody>
@@ -4189,8 +4293,8 @@
         </p:nvSpPr>
         <p:spPr>
           <a:xfrm>
-            <a:off x="320040" y="1828800"/>
-            <a:ext cx="3474720" cy="86538"/>
+            <a:off x="365760" y="1828800"/>
+            <a:ext cx="3383280" cy="92720"/>
           </a:xfrm>
           <a:prstGeom prst="rect">
             <a:avLst/>
@@ -4226,7 +4330,7 @@
             <a:r>
               <a:rPr sz="2600" b="1">
                 <a:solidFill>
-                  <a:srgbClr val="F5F0EB"/>
+                  <a:srgbClr val="1C1917"/>
                 </a:solidFill>
                 <a:latin typeface="Hiragino Sans"/>
               </a:rPr>
@@ -4242,7 +4346,7 @@
             <a:r>
               <a:rPr sz="2600" b="1">
                 <a:solidFill>
-                  <a:srgbClr val="F5F0EB"/>
+                  <a:srgbClr val="1C1917"/>
                 </a:solidFill>
                 <a:latin typeface="Hiragino Sans"/>
               </a:rPr>
@@ -4259,8 +4363,8 @@
         </p:nvSpPr>
         <p:spPr>
           <a:xfrm>
-            <a:off x="320040" y="2743200"/>
-            <a:ext cx="3474720" cy="82296"/>
+            <a:off x="365760" y="2743200"/>
+            <a:ext cx="3383280" cy="84856"/>
           </a:xfrm>
           <a:prstGeom prst="rect">
             <a:avLst/>
@@ -4285,14 +4389,14 @@
           </a:fontRef>
         </p:style>
         <p:txBody>
-          <a:bodyPr rtlCol="0" anchor="ctr" wrap="none"/>
+          <a:bodyPr rtlCol="0" anchor="ctr"/>
           <a:lstStyle/>
           <a:p>
             <a:pPr algn="l"/>
             <a:r>
-              <a:rPr sz="6000" b="1">
-                <a:solidFill>
-                  <a:srgbClr val="FFB300"/>
+              <a:rPr sz="5800" b="1">
+                <a:solidFill>
+                  <a:srgbClr val="C17817"/>
                 </a:solidFill>
                 <a:latin typeface="Hiragino Sans"/>
               </a:rPr>
@@ -4301,7 +4405,7 @@
             <a:r>
               <a:rPr sz="2800" b="1">
                 <a:solidFill>
-                  <a:srgbClr val="FFB300"/>
+                  <a:srgbClr val="C17817"/>
                 </a:solidFill>
                 <a:latin typeface="Hiragino Sans"/>
               </a:rPr>
@@ -4318,14 +4422,14 @@
         </p:nvSpPr>
         <p:spPr>
           <a:xfrm>
-            <a:off x="320040" y="3886200"/>
+            <a:off x="365760" y="3886200"/>
             <a:ext cx="914400" cy="13716"/>
           </a:xfrm>
           <a:prstGeom prst="rect">
             <a:avLst/>
           </a:prstGeom>
           <a:solidFill>
-            <a:srgbClr val="C9A02D"/>
+            <a:srgbClr val="B8942F"/>
           </a:solidFill>
           <a:ln>
             <a:noFill/>
@@ -4361,8 +4465,8 @@
         </p:nvSpPr>
         <p:spPr>
           <a:xfrm>
-            <a:off x="320040" y="4114800"/>
-            <a:ext cx="3474720" cy="69896"/>
+            <a:off x="365760" y="4114800"/>
+            <a:ext cx="3383280" cy="86410"/>
           </a:xfrm>
           <a:prstGeom prst="rect">
             <a:avLst/>
@@ -4392,13 +4496,13 @@
           <a:p>
             <a:pPr algn="l">
               <a:lnSpc>
-                <a:spcPct val="130000"/>
+                <a:spcPct val="150000"/>
               </a:lnSpc>
             </a:pPr>
             <a:r>
               <a:rPr sz="1400" b="1">
                 <a:solidFill>
-                  <a:srgbClr val="F5F0EB"/>
+                  <a:srgbClr val="1C1917"/>
                 </a:solidFill>
                 <a:latin typeface="Hiragino Sans"/>
               </a:rPr>
@@ -4408,13 +4512,13 @@
           <a:p>
             <a:pPr algn="l">
               <a:lnSpc>
-                <a:spcPct val="130000"/>
+                <a:spcPct val="150000"/>
               </a:lnSpc>
             </a:pPr>
             <a:r>
               <a:rPr sz="1400" b="1">
                 <a:solidFill>
-                  <a:srgbClr val="F5F0EB"/>
+                  <a:srgbClr val="1C1917"/>
                 </a:solidFill>
                 <a:latin typeface="Hiragino Sans"/>
               </a:rPr>
@@ -4424,13 +4528,13 @@
           <a:p>
             <a:pPr algn="l">
               <a:lnSpc>
-                <a:spcPct val="130000"/>
+                <a:spcPct val="150000"/>
               </a:lnSpc>
             </a:pPr>
             <a:r>
               <a:rPr sz="1400" b="1">
                 <a:solidFill>
-                  <a:srgbClr val="F5F0EB"/>
+                  <a:srgbClr val="1C1917"/>
                 </a:solidFill>
                 <a:latin typeface="Hiragino Sans"/>
               </a:rPr>
@@ -4447,8 +4551,8 @@
         </p:nvSpPr>
         <p:spPr>
           <a:xfrm>
-            <a:off x="320040" y="6720000"/>
-            <a:ext cx="3474720" cy="14977"/>
+            <a:off x="365760" y="6720000"/>
+            <a:ext cx="3383280" cy="16047"/>
           </a:xfrm>
           <a:prstGeom prst="rect">
             <a:avLst/>
@@ -4484,7 +4588,7 @@
             <a:r>
               <a:rPr sz="900" b="0">
                 <a:solidFill>
-                  <a:srgbClr val="C9A02D"/>
+                  <a:srgbClr val="B8942F"/>
                 </a:solidFill>
                 <a:latin typeface="Hiragino Sans"/>
               </a:rPr>
@@ -4507,7 +4611,7 @@
     <p:bg>
       <p:bgPr>
         <a:solidFill>
-          <a:srgbClr val="12100E"/>
+          <a:srgbClr val="FAF8F5"/>
         </a:solidFill>
         <a:effectLst/>
       </p:bgPr>
@@ -4527,8 +4631,8 @@
         </p:nvSpPr>
         <p:spPr>
           <a:xfrm>
-            <a:off x="320040" y="1143000"/>
-            <a:ext cx="3474720" cy="36612"/>
+            <a:off x="365760" y="1143000"/>
+            <a:ext cx="3383280" cy="39227"/>
           </a:xfrm>
           <a:prstGeom prst="rect">
             <a:avLst/>
@@ -4564,7 +4668,7 @@
             <a:r>
               <a:rPr sz="2200" b="1">
                 <a:solidFill>
-                  <a:srgbClr val="F5F0EB"/>
+                  <a:srgbClr val="1C1917"/>
                 </a:solidFill>
                 <a:latin typeface="Hiragino Sans"/>
               </a:rPr>
@@ -4581,8 +4685,8 @@
         </p:nvSpPr>
         <p:spPr>
           <a:xfrm>
-            <a:off x="320040" y="1828800"/>
-            <a:ext cx="3474720" cy="93195"/>
+            <a:off x="365760" y="1828800"/>
+            <a:ext cx="3383280" cy="99852"/>
           </a:xfrm>
           <a:prstGeom prst="rect">
             <a:avLst/>
@@ -4618,7 +4722,7 @@
             <a:r>
               <a:rPr sz="2800" b="1">
                 <a:solidFill>
-                  <a:srgbClr val="F5F0EB"/>
+                  <a:srgbClr val="1C1917"/>
                 </a:solidFill>
                 <a:latin typeface="Hiragino Sans"/>
               </a:rPr>
@@ -4634,7 +4738,7 @@
             <a:r>
               <a:rPr sz="2800" b="1">
                 <a:solidFill>
-                  <a:srgbClr val="F5F0EB"/>
+                  <a:srgbClr val="1C1917"/>
                 </a:solidFill>
                 <a:latin typeface="Hiragino Sans"/>
               </a:rPr>
@@ -4651,8 +4755,8 @@
         </p:nvSpPr>
         <p:spPr>
           <a:xfrm>
-            <a:off x="320040" y="2971800"/>
-            <a:ext cx="3474720" cy="46597"/>
+            <a:off x="365760" y="2971800"/>
+            <a:ext cx="3383280" cy="49926"/>
           </a:xfrm>
           <a:prstGeom prst="rect">
             <a:avLst/>
@@ -4688,7 +4792,7 @@
             <a:r>
               <a:rPr sz="2800" b="1">
                 <a:solidFill>
-                  <a:srgbClr val="E84D3D"/>
+                  <a:srgbClr val="B5453A"/>
                 </a:solidFill>
                 <a:latin typeface="Hiragino Sans"/>
               </a:rPr>
@@ -4705,14 +4809,14 @@
         </p:nvSpPr>
         <p:spPr>
           <a:xfrm>
-            <a:off x="320040" y="3657600"/>
+            <a:off x="365760" y="3657600"/>
             <a:ext cx="914400" cy="13716"/>
           </a:xfrm>
           <a:prstGeom prst="rect">
             <a:avLst/>
           </a:prstGeom>
           <a:solidFill>
-            <a:srgbClr val="C9A02D"/>
+            <a:srgbClr val="B8942F"/>
           </a:solidFill>
           <a:ln>
             <a:noFill/>
@@ -4748,8 +4852,8 @@
         </p:nvSpPr>
         <p:spPr>
           <a:xfrm>
-            <a:off x="320040" y="3886200"/>
-            <a:ext cx="3474720" cy="106509"/>
+            <a:off x="365760" y="3886200"/>
+            <a:ext cx="3383280" cy="105338"/>
           </a:xfrm>
           <a:prstGeom prst="rect">
             <a:avLst/>
@@ -4783,9 +4887,9 @@
               </a:lnSpc>
             </a:pPr>
             <a:r>
-              <a:rPr sz="1300" b="0">
-                <a:solidFill>
-                  <a:srgbClr val="78716C"/>
+              <a:rPr sz="1200" b="0">
+                <a:solidFill>
+                  <a:srgbClr val="7A6652"/>
                 </a:solidFill>
                 <a:latin typeface="Hiragino Sans"/>
               </a:rPr>
@@ -4799,9 +4903,9 @@
               </a:lnSpc>
             </a:pPr>
             <a:r>
-              <a:rPr sz="1300" b="0">
-                <a:solidFill>
-                  <a:srgbClr val="78716C"/>
+              <a:rPr sz="1200" b="0">
+                <a:solidFill>
+                  <a:srgbClr val="7A6652"/>
                 </a:solidFill>
                 <a:latin typeface="Hiragino Sans"/>
               </a:rPr>
@@ -4815,9 +4919,9 @@
               </a:lnSpc>
             </a:pPr>
             <a:r>
-              <a:rPr sz="1300" b="0">
-                <a:solidFill>
-                  <a:srgbClr val="78716C"/>
+              <a:rPr sz="1200" b="0">
+                <a:solidFill>
+                  <a:srgbClr val="7A6652"/>
                 </a:solidFill>
                 <a:latin typeface="Hiragino Sans"/>
               </a:rPr>
@@ -4831,9 +4935,9 @@
               </a:lnSpc>
             </a:pPr>
             <a:r>
-              <a:rPr sz="1300" b="0">
-                <a:solidFill>
-                  <a:srgbClr val="78716C"/>
+              <a:rPr sz="1200" b="0">
+                <a:solidFill>
+                  <a:srgbClr val="7A6652"/>
                 </a:solidFill>
                 <a:latin typeface="Hiragino Sans"/>
               </a:rPr>
@@ -4850,8 +4954,8 @@
         </p:nvSpPr>
         <p:spPr>
           <a:xfrm>
-            <a:off x="320040" y="6720000"/>
-            <a:ext cx="3474720" cy="14977"/>
+            <a:off x="365760" y="6720000"/>
+            <a:ext cx="3383280" cy="16047"/>
           </a:xfrm>
           <a:prstGeom prst="rect">
             <a:avLst/>
@@ -4887,7 +4991,7 @@
             <a:r>
               <a:rPr sz="900" b="0">
                 <a:solidFill>
-                  <a:srgbClr val="C9A02D"/>
+                  <a:srgbClr val="B8942F"/>
                 </a:solidFill>
                 <a:latin typeface="Hiragino Sans"/>
               </a:rPr>
@@ -4910,7 +5014,7 @@
     <p:bg>
       <p:bgPr>
         <a:solidFill>
-          <a:srgbClr val="12100E"/>
+          <a:srgbClr val="FAF8F5"/>
         </a:solidFill>
         <a:effectLst/>
       </p:bgPr>
@@ -4930,8 +5034,8 @@
         </p:nvSpPr>
         <p:spPr>
           <a:xfrm>
-            <a:off x="320040" y="1600200"/>
-            <a:ext cx="3474720" cy="149778"/>
+            <a:off x="365760" y="1600200"/>
+            <a:ext cx="3383280" cy="160477"/>
           </a:xfrm>
           <a:prstGeom prst="rect">
             <a:avLst/>
@@ -4967,7 +5071,7 @@
             <a:r>
               <a:rPr sz="3000" b="1">
                 <a:solidFill>
-                  <a:srgbClr val="F5F0EB"/>
+                  <a:srgbClr val="1C1917"/>
                 </a:solidFill>
                 <a:latin typeface="Hiragino Sans"/>
               </a:rPr>
@@ -4983,7 +5087,7 @@
             <a:r>
               <a:rPr sz="3000" b="1">
                 <a:solidFill>
-                  <a:srgbClr val="F5F0EB"/>
+                  <a:srgbClr val="1C1917"/>
                 </a:solidFill>
                 <a:latin typeface="Hiragino Sans"/>
               </a:rPr>
@@ -4999,7 +5103,7 @@
             <a:r>
               <a:rPr sz="3000" b="1">
                 <a:solidFill>
-                  <a:srgbClr val="F5F0EB"/>
+                  <a:srgbClr val="1C1917"/>
                 </a:solidFill>
                 <a:latin typeface="Hiragino Sans"/>
               </a:rPr>
@@ -5016,8 +5120,8 @@
         </p:nvSpPr>
         <p:spPr>
           <a:xfrm>
-            <a:off x="320040" y="3429000"/>
-            <a:ext cx="3474720" cy="106509"/>
+            <a:off x="365760" y="3429000"/>
+            <a:ext cx="3383280" cy="114117"/>
           </a:xfrm>
           <a:prstGeom prst="rect">
             <a:avLst/>
@@ -5053,7 +5157,7 @@
             <a:r>
               <a:rPr sz="3200" b="1">
                 <a:solidFill>
-                  <a:srgbClr val="C9A02D"/>
+                  <a:srgbClr val="B8942F"/>
                 </a:solidFill>
                 <a:latin typeface="Hiragino Sans"/>
               </a:rPr>
@@ -5069,7 +5173,7 @@
             <a:r>
               <a:rPr sz="3200" b="1">
                 <a:solidFill>
-                  <a:srgbClr val="C9A02D"/>
+                  <a:srgbClr val="B8942F"/>
                 </a:solidFill>
                 <a:latin typeface="Hiragino Sans"/>
               </a:rPr>
@@ -5086,8 +5190,8 @@
         </p:nvSpPr>
         <p:spPr>
           <a:xfrm>
-            <a:off x="320040" y="6172200"/>
-            <a:ext cx="3474720" cy="13313"/>
+            <a:off x="365760" y="6400000"/>
+            <a:ext cx="3383280" cy="12481"/>
           </a:xfrm>
           <a:prstGeom prst="rect">
             <a:avLst/>
@@ -5121,9 +5225,9 @@
               </a:lnSpc>
             </a:pPr>
             <a:r>
-              <a:rPr sz="800" b="0">
-                <a:solidFill>
-                  <a:srgbClr val="4A4540"/>
+              <a:rPr sz="700" b="0">
+                <a:solidFill>
+                  <a:srgbClr val="BFAD9C"/>
                 </a:solidFill>
                 <a:latin typeface="Hiragino Sans"/>
               </a:rPr>
@@ -5140,8 +5244,8 @@
         </p:nvSpPr>
         <p:spPr>
           <a:xfrm>
-            <a:off x="320040" y="6720000"/>
-            <a:ext cx="3474720" cy="14977"/>
+            <a:off x="365760" y="6720000"/>
+            <a:ext cx="3383280" cy="16047"/>
           </a:xfrm>
           <a:prstGeom prst="rect">
             <a:avLst/>
@@ -5177,7 +5281,7 @@
             <a:r>
               <a:rPr sz="900" b="0">
                 <a:solidFill>
-                  <a:srgbClr val="C9A02D"/>
+                  <a:srgbClr val="B8942F"/>
                 </a:solidFill>
                 <a:latin typeface="Hiragino Sans"/>
               </a:rPr>
